--- a/V2授课PPT/W04-第7次课-向量化：让计算快100倍.pptx
+++ b/V2授课PPT/W04-第7次课-向量化：让计算快100倍.pptx
@@ -51,6 +51,9 @@
     <p:sldId id="337" r:id="rId89"/>
     <p:sldId id="339" r:id="rId91"/>
     <p:sldId id="340" r:id="rId92"/>
+    <p:sldId id="371" r:id="rId70"/>
+    <p:sldId id="372" r:id="rId71"/>
+    <p:sldId id="373" r:id="rId69"/>
     <p:sldId id="341" r:id="rId93"/>
     <p:sldId id="342" r:id="rId94"/>
     <p:sldId id="343" r:id="rId95"/>
@@ -8846,7 +8849,7 @@
                 </a:solidFill>
                 <a:latin typeface="微软雅黑"/>
               </a:rPr>
-              <a:t>10 / 62</a:t>
+              <a:t>10 / 65</a:t>
             </a:r>
           </a:p>
         </p:txBody>
@@ -9552,7 +9555,7 @@
                 </a:solidFill>
                 <a:latin typeface="微软雅黑"/>
               </a:rPr>
-              <a:t>11 / 62</a:t>
+              <a:t>11 / 65</a:t>
             </a:r>
           </a:p>
         </p:txBody>
@@ -10258,7 +10261,7 @@
                 </a:solidFill>
                 <a:latin typeface="微软雅黑"/>
               </a:rPr>
-              <a:t>12 / 62</a:t>
+              <a:t>12 / 65</a:t>
             </a:r>
           </a:p>
         </p:txBody>
@@ -10964,7 +10967,7 @@
                 </a:solidFill>
                 <a:latin typeface="微软雅黑"/>
               </a:rPr>
-              <a:t>13 / 62</a:t>
+              <a:t>13 / 65</a:t>
             </a:r>
           </a:p>
         </p:txBody>
@@ -11450,7 +11453,7 @@
                 </a:solidFill>
                 <a:latin typeface="微软雅黑"/>
               </a:rPr>
-              <a:t>14 / 62</a:t>
+              <a:t>14 / 65</a:t>
             </a:r>
           </a:p>
         </p:txBody>
@@ -12479,7 +12482,7 @@
                 </a:solidFill>
                 <a:latin typeface="微软雅黑"/>
               </a:rPr>
-              <a:t>15 / 62</a:t>
+              <a:t>15 / 65</a:t>
             </a:r>
           </a:p>
         </p:txBody>
@@ -13185,7 +13188,7 @@
                 </a:solidFill>
                 <a:latin typeface="微软雅黑"/>
               </a:rPr>
-              <a:t>16 / 62</a:t>
+              <a:t>16 / 65</a:t>
             </a:r>
           </a:p>
         </p:txBody>
@@ -13659,7 +13662,7 @@
                 </a:solidFill>
                 <a:latin typeface="微软雅黑"/>
               </a:rPr>
-              <a:t>17 / 62</a:t>
+              <a:t>17 / 65</a:t>
             </a:r>
           </a:p>
         </p:txBody>
@@ -14365,7 +14368,7 @@
                 </a:solidFill>
                 <a:latin typeface="微软雅黑"/>
               </a:rPr>
-              <a:t>18 / 62</a:t>
+              <a:t>18 / 65</a:t>
             </a:r>
           </a:p>
         </p:txBody>
@@ -15337,7 +15340,7 @@
                 </a:solidFill>
                 <a:latin typeface="微软雅黑"/>
               </a:rPr>
-              <a:t>19 / 62</a:t>
+              <a:t>19 / 65</a:t>
             </a:r>
           </a:p>
         </p:txBody>
@@ -17065,7 +17068,7 @@
                 </a:solidFill>
                 <a:latin typeface="微软雅黑"/>
               </a:rPr>
-              <a:t>2 / 62</a:t>
+              <a:t>2 / 65</a:t>
             </a:r>
           </a:p>
         </p:txBody>
@@ -17920,7 +17923,7 @@
                 </a:solidFill>
                 <a:latin typeface="微软雅黑"/>
               </a:rPr>
-              <a:t>20 / 62</a:t>
+              <a:t>20 / 65</a:t>
             </a:r>
           </a:p>
         </p:txBody>
@@ -18890,7 +18893,7 @@
                 </a:solidFill>
                 <a:latin typeface="微软雅黑"/>
               </a:rPr>
-              <a:t>21 / 62</a:t>
+              <a:t>21 / 65</a:t>
             </a:r>
           </a:p>
         </p:txBody>
@@ -19860,7 +19863,7 @@
                 </a:solidFill>
                 <a:latin typeface="微软雅黑"/>
               </a:rPr>
-              <a:t>22 / 62</a:t>
+              <a:t>22 / 65</a:t>
             </a:r>
           </a:p>
         </p:txBody>
@@ -20396,7 +20399,7 @@
                 </a:solidFill>
                 <a:latin typeface="微软雅黑"/>
               </a:rPr>
-              <a:t>23 / 62</a:t>
+              <a:t>23 / 65</a:t>
             </a:r>
           </a:p>
         </p:txBody>
@@ -21366,7 +21369,7 @@
                 </a:solidFill>
                 <a:latin typeface="微软雅黑"/>
               </a:rPr>
-              <a:t>24 / 62</a:t>
+              <a:t>24 / 65</a:t>
             </a:r>
           </a:p>
         </p:txBody>
@@ -22336,7 +22339,7 @@
                 </a:solidFill>
                 <a:latin typeface="微软雅黑"/>
               </a:rPr>
-              <a:t>25 / 62</a:t>
+              <a:t>25 / 65</a:t>
             </a:r>
           </a:p>
         </p:txBody>
@@ -23306,7 +23309,7 @@
                 </a:solidFill>
                 <a:latin typeface="微软雅黑"/>
               </a:rPr>
-              <a:t>26 / 62</a:t>
+              <a:t>26 / 65</a:t>
             </a:r>
           </a:p>
         </p:txBody>
@@ -24276,7 +24279,7 @@
                 </a:solidFill>
                 <a:latin typeface="微软雅黑"/>
               </a:rPr>
-              <a:t>27 / 62</a:t>
+              <a:t>27 / 65</a:t>
             </a:r>
           </a:p>
         </p:txBody>
@@ -25246,7 +25249,7 @@
                 </a:solidFill>
                 <a:latin typeface="微软雅黑"/>
               </a:rPr>
-              <a:t>28 / 62</a:t>
+              <a:t>28 / 65</a:t>
             </a:r>
           </a:p>
         </p:txBody>
@@ -26218,7 +26221,7 @@
                 </a:solidFill>
                 <a:latin typeface="微软雅黑"/>
               </a:rPr>
-              <a:t>29 / 62</a:t>
+              <a:t>29 / 65</a:t>
             </a:r>
           </a:p>
         </p:txBody>
@@ -27073,7 +27076,7 @@
                 </a:solidFill>
                 <a:latin typeface="微软雅黑"/>
               </a:rPr>
-              <a:t>3 / 62</a:t>
+              <a:t>3 / 65</a:t>
             </a:r>
           </a:p>
         </p:txBody>
@@ -27779,7 +27782,7 @@
                 </a:solidFill>
                 <a:latin typeface="微软雅黑"/>
               </a:rPr>
-              <a:t>30 / 62</a:t>
+              <a:t>30 / 65</a:t>
             </a:r>
           </a:p>
         </p:txBody>
@@ -28261,7 +28264,7 @@
                 </a:solidFill>
                 <a:latin typeface="微软雅黑"/>
               </a:rPr>
-              <a:t>31 / 62</a:t>
+              <a:t>31 / 65</a:t>
             </a:r>
           </a:p>
         </p:txBody>
@@ -28686,7 +28689,7 @@
                 </a:solidFill>
                 <a:latin typeface="微软雅黑"/>
               </a:rPr>
-              <a:t>32 / 62</a:t>
+              <a:t>32 / 65</a:t>
             </a:r>
           </a:p>
         </p:txBody>
@@ -29541,7 +29544,7 @@
                 </a:solidFill>
                 <a:latin typeface="微软雅黑"/>
               </a:rPr>
-              <a:t>33 / 62</a:t>
+              <a:t>33 / 65</a:t>
             </a:r>
           </a:p>
         </p:txBody>
@@ -30645,7 +30648,7 @@
                 </a:solidFill>
                 <a:latin typeface="微软雅黑"/>
               </a:rPr>
-              <a:t>34 / 62</a:t>
+              <a:t>34 / 65</a:t>
             </a:r>
           </a:p>
         </p:txBody>
@@ -31437,7 +31440,7 @@
                 </a:solidFill>
                 <a:latin typeface="微软雅黑"/>
               </a:rPr>
-              <a:t>35 / 62</a:t>
+              <a:t>35 / 65</a:t>
             </a:r>
           </a:p>
         </p:txBody>
@@ -32070,7 +32073,7 @@
                 </a:solidFill>
                 <a:latin typeface="微软雅黑"/>
               </a:rPr>
-              <a:t>36 / 62</a:t>
+              <a:t>36 / 65</a:t>
             </a:r>
           </a:p>
         </p:txBody>
@@ -32990,7 +32993,7 @@
                 </a:solidFill>
                 <a:latin typeface="微软雅黑"/>
               </a:rPr>
-              <a:t>37 / 62</a:t>
+              <a:t>37 / 65</a:t>
             </a:r>
           </a:p>
         </p:txBody>
@@ -33910,7 +33913,7 @@
                 </a:solidFill>
                 <a:latin typeface="微软雅黑"/>
               </a:rPr>
-              <a:t>38 / 62</a:t>
+              <a:t>38 / 65</a:t>
             </a:r>
           </a:p>
         </p:txBody>
@@ -34830,7 +34833,7 @@
                 </a:solidFill>
                 <a:latin typeface="微软雅黑"/>
               </a:rPr>
-              <a:t>39 / 62</a:t>
+              <a:t>39 / 65</a:t>
             </a:r>
           </a:p>
         </p:txBody>
@@ -35802,7 +35805,7 @@
                 </a:solidFill>
                 <a:latin typeface="微软雅黑"/>
               </a:rPr>
-              <a:t>4 / 62</a:t>
+              <a:t>4 / 65</a:t>
             </a:r>
           </a:p>
         </p:txBody>
@@ -36741,7 +36744,7 @@
                 </a:solidFill>
                 <a:latin typeface="微软雅黑"/>
               </a:rPr>
-              <a:t>40 / 62</a:t>
+              <a:t>40 / 65</a:t>
             </a:r>
           </a:p>
         </p:txBody>
@@ -37657,7 +37660,7 @@
                 </a:solidFill>
                 <a:latin typeface="微软雅黑"/>
               </a:rPr>
-              <a:t>41 / 62</a:t>
+              <a:t>41 / 65</a:t>
             </a:r>
           </a:p>
         </p:txBody>
@@ -38581,7 +38584,7 @@
                 </a:solidFill>
                 <a:latin typeface="微软雅黑"/>
               </a:rPr>
-              <a:t>42 / 62</a:t>
+              <a:t>42 / 65</a:t>
             </a:r>
           </a:p>
         </p:txBody>
@@ -39373,7 +39376,7 @@
                 </a:solidFill>
                 <a:latin typeface="微软雅黑"/>
               </a:rPr>
-              <a:t>43 / 62</a:t>
+              <a:t>43 / 65</a:t>
             </a:r>
           </a:p>
         </p:txBody>
@@ -40165,7 +40168,7 @@
                 </a:solidFill>
                 <a:latin typeface="微软雅黑"/>
               </a:rPr>
-              <a:t>44 / 62</a:t>
+              <a:t>44 / 65</a:t>
             </a:r>
           </a:p>
         </p:txBody>
@@ -41020,7 +41023,7 @@
                 </a:solidFill>
                 <a:latin typeface="微软雅黑"/>
               </a:rPr>
-              <a:t>45 / 62</a:t>
+              <a:t>45 / 65</a:t>
             </a:r>
           </a:p>
         </p:txBody>
@@ -41728,7 +41731,7 @@
                 </a:solidFill>
                 <a:latin typeface="微软雅黑"/>
               </a:rPr>
-              <a:t>46 / 62</a:t>
+              <a:t>46 / 65</a:t>
             </a:r>
           </a:p>
         </p:txBody>
@@ -42368,7 +42371,7 @@
                 </a:solidFill>
                 <a:latin typeface="微软雅黑"/>
               </a:rPr>
-              <a:t>47 / 62</a:t>
+              <a:t>50 / 65</a:t>
             </a:r>
           </a:p>
         </p:txBody>
@@ -42953,7 +42956,7 @@
                 </a:solidFill>
                 <a:latin typeface="微软雅黑"/>
               </a:rPr>
-              <a:t>48 / 62</a:t>
+              <a:t>51 / 65</a:t>
             </a:r>
           </a:p>
         </p:txBody>
@@ -43745,7 +43748,7 @@
                 </a:solidFill>
                 <a:latin typeface="微软雅黑"/>
               </a:rPr>
-              <a:t>49 / 62</a:t>
+              <a:t>52 / 65</a:t>
             </a:r>
           </a:p>
         </p:txBody>
@@ -45213,7 +45216,7 @@
                 </a:solidFill>
                 <a:latin typeface="微软雅黑"/>
               </a:rPr>
-              <a:t>5 / 62</a:t>
+              <a:t>5 / 65</a:t>
             </a:r>
           </a:p>
         </p:txBody>
@@ -45807,7 +45810,7 @@
                 </a:solidFill>
                 <a:latin typeface="微软雅黑"/>
               </a:rPr>
-              <a:t>50 / 62</a:t>
+              <a:t>53 / 65</a:t>
             </a:r>
           </a:p>
         </p:txBody>
@@ -47463,7 +47466,7 @@
                 </a:solidFill>
                 <a:latin typeface="微软雅黑"/>
               </a:rPr>
-              <a:t>51 / 62</a:t>
+              <a:t>54 / 65</a:t>
             </a:r>
           </a:p>
         </p:txBody>
@@ -48261,7 +48264,7 @@
                 </a:solidFill>
                 <a:latin typeface="微软雅黑"/>
               </a:rPr>
-              <a:t>52 / 62</a:t>
+              <a:t>55 / 65</a:t>
             </a:r>
           </a:p>
         </p:txBody>
@@ -49407,7 +49410,7 @@
                 </a:solidFill>
                 <a:latin typeface="微软雅黑"/>
               </a:rPr>
-              <a:t>53 / 62</a:t>
+              <a:t>56 / 65</a:t>
             </a:r>
           </a:p>
         </p:txBody>
@@ -50260,7 +50263,7 @@
                 </a:solidFill>
                 <a:latin typeface="微软雅黑"/>
               </a:rPr>
-              <a:t>54 / 62</a:t>
+              <a:t>57 / 65</a:t>
             </a:r>
           </a:p>
         </p:txBody>
@@ -51232,7 +51235,7 @@
                 </a:solidFill>
                 <a:latin typeface="微软雅黑"/>
               </a:rPr>
-              <a:t>55 / 62</a:t>
+              <a:t>58 / 65</a:t>
             </a:r>
           </a:p>
         </p:txBody>
@@ -52204,7 +52207,7 @@
                 </a:solidFill>
                 <a:latin typeface="微软雅黑"/>
               </a:rPr>
-              <a:t>56 / 62</a:t>
+              <a:t>59 / 65</a:t>
             </a:r>
           </a:p>
         </p:txBody>
@@ -53463,7 +53466,7 @@
                 </a:solidFill>
                 <a:latin typeface="微软雅黑"/>
               </a:rPr>
-              <a:t>57 / 62</a:t>
+              <a:t>60 / 65</a:t>
             </a:r>
           </a:p>
         </p:txBody>
@@ -54435,7 +54438,7 @@
                 </a:solidFill>
                 <a:latin typeface="微软雅黑"/>
               </a:rPr>
-              <a:t>58 / 62</a:t>
+              <a:t>61 / 65</a:t>
             </a:r>
           </a:p>
         </p:txBody>
@@ -55407,7 +55410,7 @@
                 </a:solidFill>
                 <a:latin typeface="微软雅黑"/>
               </a:rPr>
-              <a:t>59 / 62</a:t>
+              <a:t>62 / 65</a:t>
             </a:r>
           </a:p>
         </p:txBody>
@@ -56113,7 +56116,7 @@
                 </a:solidFill>
                 <a:latin typeface="微软雅黑"/>
               </a:rPr>
-              <a:t>6 / 62</a:t>
+              <a:t>6 / 65</a:t>
             </a:r>
           </a:p>
         </p:txBody>
@@ -56905,7 +56908,7 @@
                 </a:solidFill>
                 <a:latin typeface="微软雅黑"/>
               </a:rPr>
-              <a:t>60 / 62</a:t>
+              <a:t>63 / 65</a:t>
             </a:r>
           </a:p>
         </p:txBody>
@@ -57265,7 +57268,7 @@
                 </a:solidFill>
                 <a:latin typeface="微软雅黑"/>
               </a:rPr>
-              <a:t>61 / 62</a:t>
+              <a:t>64 / 65</a:t>
             </a:r>
           </a:p>
         </p:txBody>
@@ -57636,6 +57639,3020 @@
 </p:sld>
 </file>
 
+<file path=ppt/slides/slide63.xml><?xml version="1.0" encoding="utf-8"?>
+<p:sld xmlns:a="http://schemas.openxmlformats.org/drawingml/2006/main" xmlns:p="http://schemas.openxmlformats.org/presentationml/2006/main" xmlns:r="http://schemas.openxmlformats.org/officeDocument/2006/relationships">
+  <p:cSld>
+    <p:spTree>
+      <p:nvGrpSpPr>
+        <p:cNvPr id="1" name=""/>
+        <p:cNvGrpSpPr/>
+        <p:nvPr/>
+      </p:nvGrpSpPr>
+      <p:grpSpPr/>
+      <p:sp>
+        <p:nvSpPr>
+          <p:cNvPr id="2" name="Rounded Rectangle 1"/>
+          <p:cNvSpPr/>
+          <p:nvPr/>
+        </p:nvSpPr>
+        <p:spPr>
+          <a:xfrm>
+            <a:off x="0" y="0"/>
+            <a:ext cx="12191695" cy="64008"/>
+          </a:xfrm>
+          <a:prstGeom prst="roundRect">
+            <a:avLst>
+              <a:gd name="adj" fmla="val 50000"/>
+            </a:avLst>
+          </a:prstGeom>
+          <a:solidFill>
+            <a:srgbClr val="0B5E54"/>
+          </a:solidFill>
+          <a:ln>
+            <a:noFill/>
+          </a:ln>
+          <a:effectLst/>
+        </p:spPr>
+        <p:style>
+          <a:lnRef idx="1">
+            <a:schemeClr val="accent1"/>
+          </a:lnRef>
+          <a:fillRef idx="3">
+            <a:schemeClr val="accent1"/>
+          </a:fillRef>
+          <a:effectRef idx="2">
+            <a:schemeClr val="accent1"/>
+          </a:effectRef>
+          <a:fontRef idx="minor">
+            <a:schemeClr val="lt1"/>
+          </a:fontRef>
+        </p:style>
+        <p:txBody>
+          <a:bodyPr rtlCol="0" anchor="ctr"/>
+          <a:lstStyle/>
+          <a:p>
+            <a:pPr algn="ctr"/>
+          </a:p>
+        </p:txBody>
+      </p:sp>
+      <p:sp>
+        <p:nvSpPr>
+          <p:cNvPr id="3" name="TextBox 2"/>
+          <p:cNvSpPr txBox="1"/>
+          <p:nvPr/>
+        </p:nvSpPr>
+        <p:spPr>
+          <a:xfrm>
+            <a:off x="475488" y="146304"/>
+            <a:ext cx="8229600" cy="292608"/>
+          </a:xfrm>
+          <a:prstGeom prst="rect">
+            <a:avLst/>
+          </a:prstGeom>
+          <a:noFill/>
+        </p:spPr>
+        <p:txBody>
+          <a:bodyPr wrap="square" anchor="t" lIns="0" rIns="0" tIns="0" bIns="0">
+            <a:spAutoFit/>
+          </a:bodyPr>
+          <a:lstStyle/>
+          <a:p>
+            <a:pPr algn="l">
+              <a:lnSpc>
+                <a:spcPct val="114000"/>
+              </a:lnSpc>
+            </a:pPr>
+            <a:r>
+              <a:rPr sz="1100" b="1">
+                <a:solidFill>
+                  <a:srgbClr val="0B5E54"/>
+                </a:solidFill>
+              </a:rPr>
+              <a:t>工单实战 · 本次实跑结果</a:t>
+            </a:r>
+          </a:p>
+        </p:txBody>
+      </p:sp>
+      <p:sp>
+        <p:nvSpPr>
+          <p:cNvPr id="4" name="Rounded Rectangle 3"/>
+          <p:cNvSpPr/>
+          <p:nvPr/>
+        </p:nvSpPr>
+        <p:spPr>
+          <a:xfrm>
+            <a:off x="475488" y="475488"/>
+            <a:ext cx="1881187" cy="310896"/>
+          </a:xfrm>
+          <a:prstGeom prst="roundRect">
+            <a:avLst>
+              <a:gd name="adj" fmla="val 50000"/>
+            </a:avLst>
+          </a:prstGeom>
+          <a:solidFill>
+            <a:srgbClr val="C9A227"/>
+          </a:solidFill>
+          <a:ln>
+            <a:noFill/>
+          </a:ln>
+          <a:effectLst/>
+        </p:spPr>
+        <p:style>
+          <a:lnRef idx="1">
+            <a:schemeClr val="accent1"/>
+          </a:lnRef>
+          <a:fillRef idx="3">
+            <a:schemeClr val="accent1"/>
+          </a:fillRef>
+          <a:effectRef idx="2">
+            <a:schemeClr val="accent1"/>
+          </a:effectRef>
+          <a:fontRef idx="minor">
+            <a:schemeClr val="lt1"/>
+          </a:fontRef>
+        </p:style>
+        <p:txBody>
+          <a:bodyPr rtlCol="0" anchor="ctr"/>
+          <a:lstStyle/>
+          <a:p>
+            <a:pPr algn="ctr"/>
+          </a:p>
+        </p:txBody>
+      </p:sp>
+      <p:sp>
+        <p:nvSpPr>
+          <p:cNvPr id="5" name="TextBox 4"/>
+          <p:cNvSpPr txBox="1"/>
+          <p:nvPr/>
+        </p:nvSpPr>
+        <p:spPr>
+          <a:xfrm>
+            <a:off x="475488" y="475488"/>
+            <a:ext cx="1881187" cy="310896"/>
+          </a:xfrm>
+          <a:prstGeom prst="rect">
+            <a:avLst/>
+          </a:prstGeom>
+          <a:noFill/>
+        </p:spPr>
+        <p:txBody>
+          <a:bodyPr wrap="square" anchor="ctr" lIns="0" rIns="0" tIns="0" bIns="0">
+            <a:spAutoFit/>
+          </a:bodyPr>
+          <a:lstStyle/>
+          <a:p>
+            <a:pPr algn="ctr">
+              <a:lnSpc>
+                <a:spcPct val="114000"/>
+              </a:lnSpc>
+            </a:pPr>
+            <a:r>
+              <a:rPr sz="1050" b="1">
+                <a:solidFill>
+                  <a:srgbClr val="FFFFFF"/>
+                </a:solidFill>
+              </a:rPr>
+              <a:t>REAL RUN · 四档逐字实测</a:t>
+            </a:r>
+          </a:p>
+        </p:txBody>
+      </p:sp>
+      <p:sp>
+        <p:nvSpPr>
+          <p:cNvPr id="6" name="TextBox 5"/>
+          <p:cNvSpPr txBox="1"/>
+          <p:nvPr/>
+        </p:nvSpPr>
+        <p:spPr>
+          <a:xfrm>
+            <a:off x="475488" y="859536"/>
+            <a:ext cx="11237976" cy="502920"/>
+          </a:xfrm>
+          <a:prstGeom prst="rect">
+            <a:avLst/>
+          </a:prstGeom>
+          <a:noFill/>
+        </p:spPr>
+        <p:txBody>
+          <a:bodyPr wrap="square" anchor="t" lIns="0" rIns="0" tIns="0" bIns="0">
+            <a:spAutoFit/>
+          </a:bodyPr>
+          <a:lstStyle/>
+          <a:p>
+            <a:pPr algn="l">
+              <a:lnSpc>
+                <a:spcPct val="114000"/>
+              </a:lnSpc>
+            </a:pPr>
+            <a:r>
+              <a:rPr sz="2200" b="1">
+                <a:solidFill>
+                  <a:srgbClr val="1B2B28"/>
+                </a:solidFill>
+              </a:rPr>
+              <a:t>P2.2 p22_feature_factory：本次 D/C/B/A 四档实测</a:t>
+            </a:r>
+          </a:p>
+        </p:txBody>
+      </p:sp>
+      <p:sp>
+        <p:nvSpPr>
+          <p:cNvPr id="7" name="Rounded Rectangle 6"/>
+          <p:cNvSpPr/>
+          <p:nvPr/>
+        </p:nvSpPr>
+        <p:spPr>
+          <a:xfrm>
+            <a:off x="475488" y="1389888"/>
+            <a:ext cx="1234440" cy="27432"/>
+          </a:xfrm>
+          <a:prstGeom prst="roundRect">
+            <a:avLst>
+              <a:gd name="adj" fmla="val 50000"/>
+            </a:avLst>
+          </a:prstGeom>
+          <a:solidFill>
+            <a:srgbClr val="C9A227"/>
+          </a:solidFill>
+          <a:ln>
+            <a:noFill/>
+          </a:ln>
+          <a:effectLst/>
+        </p:spPr>
+        <p:style>
+          <a:lnRef idx="1">
+            <a:schemeClr val="accent1"/>
+          </a:lnRef>
+          <a:fillRef idx="3">
+            <a:schemeClr val="accent1"/>
+          </a:fillRef>
+          <a:effectRef idx="2">
+            <a:schemeClr val="accent1"/>
+          </a:effectRef>
+          <a:fontRef idx="minor">
+            <a:schemeClr val="lt1"/>
+          </a:fontRef>
+        </p:style>
+        <p:txBody>
+          <a:bodyPr rtlCol="0" anchor="ctr"/>
+          <a:lstStyle/>
+          <a:p>
+            <a:pPr algn="ctr"/>
+          </a:p>
+        </p:txBody>
+      </p:sp>
+      <p:sp>
+        <p:nvSpPr>
+          <p:cNvPr id="8" name="Rounded Rectangle 7"/>
+          <p:cNvSpPr/>
+          <p:nvPr/>
+        </p:nvSpPr>
+        <p:spPr>
+          <a:xfrm>
+            <a:off x="475488" y="6419088"/>
+            <a:ext cx="11237976" cy="10972"/>
+          </a:xfrm>
+          <a:prstGeom prst="roundRect">
+            <a:avLst>
+              <a:gd name="adj" fmla="val 50000"/>
+            </a:avLst>
+          </a:prstGeom>
+          <a:solidFill>
+            <a:srgbClr val="E4F1EE"/>
+          </a:solidFill>
+          <a:ln>
+            <a:noFill/>
+          </a:ln>
+          <a:effectLst/>
+        </p:spPr>
+        <p:style>
+          <a:lnRef idx="1">
+            <a:schemeClr val="accent1"/>
+          </a:lnRef>
+          <a:fillRef idx="3">
+            <a:schemeClr val="accent1"/>
+          </a:fillRef>
+          <a:effectRef idx="2">
+            <a:schemeClr val="accent1"/>
+          </a:effectRef>
+          <a:fontRef idx="minor">
+            <a:schemeClr val="lt1"/>
+          </a:fontRef>
+        </p:style>
+        <p:txBody>
+          <a:bodyPr rtlCol="0" anchor="ctr"/>
+          <a:lstStyle/>
+          <a:p>
+            <a:pPr algn="ctr"/>
+          </a:p>
+        </p:txBody>
+      </p:sp>
+      <p:sp>
+        <p:nvSpPr>
+          <p:cNvPr id="9" name="TextBox 8"/>
+          <p:cNvSpPr txBox="1"/>
+          <p:nvPr/>
+        </p:nvSpPr>
+        <p:spPr>
+          <a:xfrm>
+            <a:off x="475488" y="6455664"/>
+            <a:ext cx="7315200" cy="292608"/>
+          </a:xfrm>
+          <a:prstGeom prst="rect">
+            <a:avLst/>
+          </a:prstGeom>
+          <a:noFill/>
+        </p:spPr>
+        <p:txBody>
+          <a:bodyPr wrap="square" anchor="t" lIns="0" rIns="0" tIns="0" bIns="0">
+            <a:spAutoFit/>
+          </a:bodyPr>
+          <a:lstStyle/>
+          <a:p>
+            <a:pPr algn="l">
+              <a:lnSpc>
+                <a:spcPct val="114000"/>
+              </a:lnSpc>
+            </a:pPr>
+            <a:r>
+              <a:rPr sz="900" b="0">
+                <a:solidFill>
+                  <a:srgbClr val="5C6E6A"/>
+                </a:solidFill>
+              </a:rPr>
+              <a:t>两江智造集团 · Python程序设计（项目实战）</a:t>
+            </a:r>
+          </a:p>
+        </p:txBody>
+      </p:sp>
+      <p:sp>
+        <p:nvSpPr>
+          <p:cNvPr id="10" name="TextBox 9"/>
+          <p:cNvSpPr txBox="1"/>
+          <p:nvPr/>
+        </p:nvSpPr>
+        <p:spPr>
+          <a:xfrm>
+            <a:off x="10597896" y="6537960"/>
+            <a:ext cx="996696" cy="301752"/>
+          </a:xfrm>
+          <a:prstGeom prst="rect">
+            <a:avLst/>
+          </a:prstGeom>
+          <a:noFill/>
+        </p:spPr>
+        <p:txBody>
+          <a:bodyPr wrap="square" anchor="t" lIns="0" rIns="0" tIns="0" bIns="0">
+            <a:spAutoFit/>
+          </a:bodyPr>
+          <a:lstStyle/>
+          <a:p>
+            <a:pPr algn="r">
+              <a:lnSpc>
+                <a:spcPct val="114000"/>
+              </a:lnSpc>
+            </a:pPr>
+            <a:r>
+              <a:rPr sz="1000" b="0">
+                <a:solidFill>
+                  <a:srgbClr val="8A97B5"/>
+                </a:solidFill>
+              </a:rPr>
+              <a:t>47 / 65</a:t>
+            </a:r>
+          </a:p>
+        </p:txBody>
+      </p:sp>
+      <p:sp>
+        <p:nvSpPr>
+          <p:cNvPr id="11" name="Rounded Rectangle 10"/>
+          <p:cNvSpPr/>
+          <p:nvPr/>
+        </p:nvSpPr>
+        <p:spPr>
+          <a:xfrm>
+            <a:off x="475488" y="1554480"/>
+            <a:ext cx="11237976" cy="916686"/>
+          </a:xfrm>
+          <a:prstGeom prst="roundRect">
+            <a:avLst>
+              <a:gd name="adj" fmla="val 6000"/>
+            </a:avLst>
+          </a:prstGeom>
+          <a:solidFill>
+            <a:srgbClr val="FFFFFF"/>
+          </a:solidFill>
+          <a:ln w="9525">
+            <a:solidFill>
+              <a:srgbClr val="E4F1EE"/>
+            </a:solidFill>
+          </a:ln>
+          <a:effectLst/>
+        </p:spPr>
+        <p:style>
+          <a:lnRef idx="1">
+            <a:schemeClr val="accent1"/>
+          </a:lnRef>
+          <a:fillRef idx="3">
+            <a:schemeClr val="accent1"/>
+          </a:fillRef>
+          <a:effectRef idx="2">
+            <a:schemeClr val="accent1"/>
+          </a:effectRef>
+          <a:fontRef idx="minor">
+            <a:schemeClr val="lt1"/>
+          </a:fontRef>
+        </p:style>
+        <p:txBody>
+          <a:bodyPr rtlCol="0" anchor="ctr"/>
+          <a:lstStyle/>
+          <a:p>
+            <a:pPr algn="ctr"/>
+          </a:p>
+        </p:txBody>
+      </p:sp>
+      <p:sp>
+        <p:nvSpPr>
+          <p:cNvPr id="12" name="Rounded Rectangle 11"/>
+          <p:cNvSpPr/>
+          <p:nvPr/>
+        </p:nvSpPr>
+        <p:spPr>
+          <a:xfrm>
+            <a:off x="475488" y="1554480"/>
+            <a:ext cx="54864" cy="916686"/>
+          </a:xfrm>
+          <a:prstGeom prst="roundRect">
+            <a:avLst>
+              <a:gd name="adj" fmla="val 50000"/>
+            </a:avLst>
+          </a:prstGeom>
+          <a:solidFill>
+            <a:srgbClr val="5C6E6A"/>
+          </a:solidFill>
+          <a:ln>
+            <a:noFill/>
+          </a:ln>
+          <a:effectLst/>
+        </p:spPr>
+        <p:style>
+          <a:lnRef idx="1">
+            <a:schemeClr val="accent1"/>
+          </a:lnRef>
+          <a:fillRef idx="3">
+            <a:schemeClr val="accent1"/>
+          </a:fillRef>
+          <a:effectRef idx="2">
+            <a:schemeClr val="accent1"/>
+          </a:effectRef>
+          <a:fontRef idx="minor">
+            <a:schemeClr val="lt1"/>
+          </a:fontRef>
+        </p:style>
+        <p:txBody>
+          <a:bodyPr rtlCol="0" anchor="ctr"/>
+          <a:lstStyle/>
+          <a:p>
+            <a:pPr algn="ctr"/>
+          </a:p>
+        </p:txBody>
+      </p:sp>
+      <p:sp>
+        <p:nvSpPr>
+          <p:cNvPr id="13" name="Rounded Rectangle 12"/>
+          <p:cNvSpPr/>
+          <p:nvPr/>
+        </p:nvSpPr>
+        <p:spPr>
+          <a:xfrm>
+            <a:off x="621792" y="1636776"/>
+            <a:ext cx="237744" cy="237744"/>
+          </a:xfrm>
+          <a:prstGeom prst="roundRect">
+            <a:avLst>
+              <a:gd name="adj" fmla="val 28000"/>
+            </a:avLst>
+          </a:prstGeom>
+          <a:solidFill>
+            <a:srgbClr val="5C6E6A"/>
+          </a:solidFill>
+          <a:ln>
+            <a:noFill/>
+          </a:ln>
+          <a:effectLst/>
+        </p:spPr>
+        <p:style>
+          <a:lnRef idx="1">
+            <a:schemeClr val="accent1"/>
+          </a:lnRef>
+          <a:fillRef idx="3">
+            <a:schemeClr val="accent1"/>
+          </a:fillRef>
+          <a:effectRef idx="2">
+            <a:schemeClr val="accent1"/>
+          </a:effectRef>
+          <a:fontRef idx="minor">
+            <a:schemeClr val="lt1"/>
+          </a:fontRef>
+        </p:style>
+        <p:txBody>
+          <a:bodyPr rtlCol="0" anchor="ctr"/>
+          <a:lstStyle/>
+          <a:p>
+            <a:pPr algn="ctr"/>
+          </a:p>
+        </p:txBody>
+      </p:sp>
+      <p:sp>
+        <p:nvSpPr>
+          <p:cNvPr id="14" name="TextBox 13"/>
+          <p:cNvSpPr txBox="1"/>
+          <p:nvPr/>
+        </p:nvSpPr>
+        <p:spPr>
+          <a:xfrm>
+            <a:off x="621792" y="1636776"/>
+            <a:ext cx="237744" cy="237744"/>
+          </a:xfrm>
+          <a:prstGeom prst="rect">
+            <a:avLst/>
+          </a:prstGeom>
+          <a:noFill/>
+        </p:spPr>
+        <p:txBody>
+          <a:bodyPr wrap="square" anchor="ctr" lIns="0" rIns="0" tIns="0" bIns="0">
+            <a:spAutoFit/>
+          </a:bodyPr>
+          <a:lstStyle/>
+          <a:p>
+            <a:pPr algn="ctr">
+              <a:lnSpc>
+                <a:spcPct val="114000"/>
+              </a:lnSpc>
+            </a:pPr>
+            <a:r>
+              <a:rPr sz="1000" b="1">
+                <a:solidFill>
+                  <a:srgbClr val="FFFFFF"/>
+                </a:solidFill>
+              </a:rPr>
+              <a:t>D</a:t>
+            </a:r>
+          </a:p>
+        </p:txBody>
+      </p:sp>
+      <p:sp>
+        <p:nvSpPr>
+          <p:cNvPr id="15" name="TextBox 14"/>
+          <p:cNvSpPr txBox="1"/>
+          <p:nvPr/>
+        </p:nvSpPr>
+        <p:spPr>
+          <a:xfrm>
+            <a:off x="932688" y="1618488"/>
+            <a:ext cx="8778240" cy="274320"/>
+          </a:xfrm>
+          <a:prstGeom prst="rect">
+            <a:avLst/>
+          </a:prstGeom>
+          <a:noFill/>
+        </p:spPr>
+        <p:txBody>
+          <a:bodyPr wrap="square" anchor="ctr" lIns="0" rIns="0" tIns="0" bIns="0">
+            <a:spAutoFit/>
+          </a:bodyPr>
+          <a:lstStyle/>
+          <a:p>
+            <a:pPr algn="l">
+              <a:lnSpc>
+                <a:spcPct val="114000"/>
+              </a:lnSpc>
+            </a:pPr>
+            <a:r>
+              <a:rPr sz="1050" b="1">
+                <a:solidFill>
+                  <a:srgbClr val="1B2B28"/>
+                </a:solidFill>
+              </a:rPr>
+              <a:t>及格</a:t>
+            </a:r>
+            <a:r>
+              <a:rPr sz="850" b="0">
+                <a:solidFill>
+                  <a:srgbClr val="5C6E6A"/>
+                </a:solidFill>
+              </a:rPr>
+              <a:t>   验收口径：</a:t>
+            </a:r>
+            <a:r>
+              <a:rPr sz="850" b="0">
+                <a:solidFill>
+                  <a:srgbClr val="5C6E6A"/>
+                </a:solidFill>
+              </a:rPr>
+              <a:t>30特征计算正确；向量化为主；标准化正确；PEP 8≥75%</a:t>
+            </a:r>
+          </a:p>
+        </p:txBody>
+      </p:sp>
+      <p:sp>
+        <p:nvSpPr>
+          <p:cNvPr id="16" name="Rounded Rectangle 15"/>
+          <p:cNvSpPr/>
+          <p:nvPr/>
+        </p:nvSpPr>
+        <p:spPr>
+          <a:xfrm>
+            <a:off x="10532681" y="1645920"/>
+            <a:ext cx="1052766" cy="237744"/>
+          </a:xfrm>
+          <a:prstGeom prst="roundRect">
+            <a:avLst>
+              <a:gd name="adj" fmla="val 50000"/>
+            </a:avLst>
+          </a:prstGeom>
+          <a:solidFill>
+            <a:srgbClr val="C9A227"/>
+          </a:solidFill>
+          <a:ln>
+            <a:noFill/>
+          </a:ln>
+          <a:effectLst/>
+        </p:spPr>
+        <p:style>
+          <a:lnRef idx="1">
+            <a:schemeClr val="accent1"/>
+          </a:lnRef>
+          <a:fillRef idx="3">
+            <a:schemeClr val="accent1"/>
+          </a:fillRef>
+          <a:effectRef idx="2">
+            <a:schemeClr val="accent1"/>
+          </a:effectRef>
+          <a:fontRef idx="minor">
+            <a:schemeClr val="lt1"/>
+          </a:fontRef>
+        </p:style>
+        <p:txBody>
+          <a:bodyPr rtlCol="0" anchor="ctr"/>
+          <a:lstStyle/>
+          <a:p>
+            <a:pPr algn="ctr"/>
+          </a:p>
+        </p:txBody>
+      </p:sp>
+      <p:sp>
+        <p:nvSpPr>
+          <p:cNvPr id="17" name="TextBox 16"/>
+          <p:cNvSpPr txBox="1"/>
+          <p:nvPr/>
+        </p:nvSpPr>
+        <p:spPr>
+          <a:xfrm>
+            <a:off x="10532681" y="1645920"/>
+            <a:ext cx="1052766" cy="237744"/>
+          </a:xfrm>
+          <a:prstGeom prst="rect">
+            <a:avLst/>
+          </a:prstGeom>
+          <a:noFill/>
+        </p:spPr>
+        <p:txBody>
+          <a:bodyPr wrap="square" anchor="ctr" lIns="0" rIns="0" tIns="0" bIns="0">
+            <a:spAutoFit/>
+          </a:bodyPr>
+          <a:lstStyle/>
+          <a:p>
+            <a:pPr algn="ctr">
+              <a:lnSpc>
+                <a:spcPct val="114000"/>
+              </a:lnSpc>
+            </a:pPr>
+            <a:r>
+              <a:rPr sz="850" b="1">
+                <a:solidFill>
+                  <a:srgbClr val="FFFFFF"/>
+                </a:solidFill>
+              </a:rPr>
+              <a:t>本节实测项 通过</a:t>
+            </a:r>
+          </a:p>
+        </p:txBody>
+      </p:sp>
+      <p:sp>
+        <p:nvSpPr>
+          <p:cNvPr id="18" name="TextBox 17"/>
+          <p:cNvSpPr txBox="1"/>
+          <p:nvPr/>
+        </p:nvSpPr>
+        <p:spPr>
+          <a:xfrm>
+            <a:off x="932688" y="1901952"/>
+            <a:ext cx="10671047" cy="514350"/>
+          </a:xfrm>
+          <a:prstGeom prst="rect">
+            <a:avLst/>
+          </a:prstGeom>
+          <a:noFill/>
+        </p:spPr>
+        <p:txBody>
+          <a:bodyPr wrap="square" anchor="t" lIns="0" rIns="0" tIns="0" bIns="0">
+            <a:spAutoFit/>
+          </a:bodyPr>
+          <a:lstStyle/>
+          <a:p>
+            <a:pPr algn="l">
+              <a:lnSpc>
+                <a:spcPct val="114000"/>
+              </a:lnSpc>
+            </a:pPr>
+            <a:r>
+              <a:rPr sz="950" b="0">
+                <a:solidFill>
+                  <a:srgbClr val="1B2B28"/>
+                </a:solidFill>
+              </a:rPr>
+              <a:t>主特征 30/30、重名 0、缺列 0｜向量化 AST 扫描 12 个特征函数逐样本循环 0 处</a:t>
+            </a:r>
+          </a:p>
+        </p:txBody>
+      </p:sp>
+      <p:sp>
+        <p:nvSpPr>
+          <p:cNvPr id="19" name="Rounded Rectangle 18"/>
+          <p:cNvSpPr/>
+          <p:nvPr/>
+        </p:nvSpPr>
+        <p:spPr>
+          <a:xfrm>
+            <a:off x="475488" y="2535174"/>
+            <a:ext cx="11237976" cy="916686"/>
+          </a:xfrm>
+          <a:prstGeom prst="roundRect">
+            <a:avLst>
+              <a:gd name="adj" fmla="val 6000"/>
+            </a:avLst>
+          </a:prstGeom>
+          <a:solidFill>
+            <a:srgbClr val="FFFFFF"/>
+          </a:solidFill>
+          <a:ln w="9525">
+            <a:solidFill>
+              <a:srgbClr val="E4F1EE"/>
+            </a:solidFill>
+          </a:ln>
+          <a:effectLst/>
+        </p:spPr>
+        <p:style>
+          <a:lnRef idx="1">
+            <a:schemeClr val="accent1"/>
+          </a:lnRef>
+          <a:fillRef idx="3">
+            <a:schemeClr val="accent1"/>
+          </a:fillRef>
+          <a:effectRef idx="2">
+            <a:schemeClr val="accent1"/>
+          </a:effectRef>
+          <a:fontRef idx="minor">
+            <a:schemeClr val="lt1"/>
+          </a:fontRef>
+        </p:style>
+        <p:txBody>
+          <a:bodyPr rtlCol="0" anchor="ctr"/>
+          <a:lstStyle/>
+          <a:p>
+            <a:pPr algn="ctr"/>
+          </a:p>
+        </p:txBody>
+      </p:sp>
+      <p:sp>
+        <p:nvSpPr>
+          <p:cNvPr id="20" name="Rounded Rectangle 19"/>
+          <p:cNvSpPr/>
+          <p:nvPr/>
+        </p:nvSpPr>
+        <p:spPr>
+          <a:xfrm>
+            <a:off x="475488" y="2535174"/>
+            <a:ext cx="54864" cy="916686"/>
+          </a:xfrm>
+          <a:prstGeom prst="roundRect">
+            <a:avLst>
+              <a:gd name="adj" fmla="val 50000"/>
+            </a:avLst>
+          </a:prstGeom>
+          <a:solidFill>
+            <a:srgbClr val="157A6D"/>
+          </a:solidFill>
+          <a:ln>
+            <a:noFill/>
+          </a:ln>
+          <a:effectLst/>
+        </p:spPr>
+        <p:style>
+          <a:lnRef idx="1">
+            <a:schemeClr val="accent1"/>
+          </a:lnRef>
+          <a:fillRef idx="3">
+            <a:schemeClr val="accent1"/>
+          </a:fillRef>
+          <a:effectRef idx="2">
+            <a:schemeClr val="accent1"/>
+          </a:effectRef>
+          <a:fontRef idx="minor">
+            <a:schemeClr val="lt1"/>
+          </a:fontRef>
+        </p:style>
+        <p:txBody>
+          <a:bodyPr rtlCol="0" anchor="ctr"/>
+          <a:lstStyle/>
+          <a:p>
+            <a:pPr algn="ctr"/>
+          </a:p>
+        </p:txBody>
+      </p:sp>
+      <p:sp>
+        <p:nvSpPr>
+          <p:cNvPr id="21" name="Rounded Rectangle 20"/>
+          <p:cNvSpPr/>
+          <p:nvPr/>
+        </p:nvSpPr>
+        <p:spPr>
+          <a:xfrm>
+            <a:off x="621792" y="2617470"/>
+            <a:ext cx="237744" cy="237744"/>
+          </a:xfrm>
+          <a:prstGeom prst="roundRect">
+            <a:avLst>
+              <a:gd name="adj" fmla="val 28000"/>
+            </a:avLst>
+          </a:prstGeom>
+          <a:solidFill>
+            <a:srgbClr val="157A6D"/>
+          </a:solidFill>
+          <a:ln>
+            <a:noFill/>
+          </a:ln>
+          <a:effectLst/>
+        </p:spPr>
+        <p:style>
+          <a:lnRef idx="1">
+            <a:schemeClr val="accent1"/>
+          </a:lnRef>
+          <a:fillRef idx="3">
+            <a:schemeClr val="accent1"/>
+          </a:fillRef>
+          <a:effectRef idx="2">
+            <a:schemeClr val="accent1"/>
+          </a:effectRef>
+          <a:fontRef idx="minor">
+            <a:schemeClr val="lt1"/>
+          </a:fontRef>
+        </p:style>
+        <p:txBody>
+          <a:bodyPr rtlCol="0" anchor="ctr"/>
+          <a:lstStyle/>
+          <a:p>
+            <a:pPr algn="ctr"/>
+          </a:p>
+        </p:txBody>
+      </p:sp>
+      <p:sp>
+        <p:nvSpPr>
+          <p:cNvPr id="22" name="TextBox 21"/>
+          <p:cNvSpPr txBox="1"/>
+          <p:nvPr/>
+        </p:nvSpPr>
+        <p:spPr>
+          <a:xfrm>
+            <a:off x="621792" y="2617470"/>
+            <a:ext cx="237744" cy="237744"/>
+          </a:xfrm>
+          <a:prstGeom prst="rect">
+            <a:avLst/>
+          </a:prstGeom>
+          <a:noFill/>
+        </p:spPr>
+        <p:txBody>
+          <a:bodyPr wrap="square" anchor="ctr" lIns="0" rIns="0" tIns="0" bIns="0">
+            <a:spAutoFit/>
+          </a:bodyPr>
+          <a:lstStyle/>
+          <a:p>
+            <a:pPr algn="ctr">
+              <a:lnSpc>
+                <a:spcPct val="114000"/>
+              </a:lnSpc>
+            </a:pPr>
+            <a:r>
+              <a:rPr sz="1000" b="1">
+                <a:solidFill>
+                  <a:srgbClr val="FFFFFF"/>
+                </a:solidFill>
+              </a:rPr>
+              <a:t>C</a:t>
+            </a:r>
+          </a:p>
+        </p:txBody>
+      </p:sp>
+      <p:sp>
+        <p:nvSpPr>
+          <p:cNvPr id="23" name="TextBox 22"/>
+          <p:cNvSpPr txBox="1"/>
+          <p:nvPr/>
+        </p:nvSpPr>
+        <p:spPr>
+          <a:xfrm>
+            <a:off x="932688" y="2599182"/>
+            <a:ext cx="8778240" cy="274320"/>
+          </a:xfrm>
+          <a:prstGeom prst="rect">
+            <a:avLst/>
+          </a:prstGeom>
+          <a:noFill/>
+        </p:spPr>
+        <p:txBody>
+          <a:bodyPr wrap="square" anchor="ctr" lIns="0" rIns="0" tIns="0" bIns="0">
+            <a:spAutoFit/>
+          </a:bodyPr>
+          <a:lstStyle/>
+          <a:p>
+            <a:pPr algn="l">
+              <a:lnSpc>
+                <a:spcPct val="114000"/>
+              </a:lnSpc>
+            </a:pPr>
+            <a:r>
+              <a:rPr sz="1050" b="1">
+                <a:solidFill>
+                  <a:srgbClr val="1B2B28"/>
+                </a:solidFill>
+              </a:rPr>
+              <a:t>良好</a:t>
+            </a:r>
+            <a:r>
+              <a:rPr sz="850" b="0">
+                <a:solidFill>
+                  <a:srgbClr val="5C6E6A"/>
+                </a:solidFill>
+              </a:rPr>
+              <a:t>   验收口径：</a:t>
+            </a:r>
+            <a:r>
+              <a:rPr sz="850" b="0">
+                <a:solidFill>
+                  <a:srgbClr val="5C6E6A"/>
+                </a:solidFill>
+              </a:rPr>
+              <a:t>1000样本&lt;100ms；特征字典含物理含义</a:t>
+            </a:r>
+          </a:p>
+        </p:txBody>
+      </p:sp>
+      <p:sp>
+        <p:nvSpPr>
+          <p:cNvPr id="24" name="Rounded Rectangle 23"/>
+          <p:cNvSpPr/>
+          <p:nvPr/>
+        </p:nvSpPr>
+        <p:spPr>
+          <a:xfrm>
+            <a:off x="11131803" y="2626614"/>
+            <a:ext cx="453644" cy="237744"/>
+          </a:xfrm>
+          <a:prstGeom prst="roundRect">
+            <a:avLst>
+              <a:gd name="adj" fmla="val 50000"/>
+            </a:avLst>
+          </a:prstGeom>
+          <a:solidFill>
+            <a:srgbClr val="0B5E54"/>
+          </a:solidFill>
+          <a:ln>
+            <a:noFill/>
+          </a:ln>
+          <a:effectLst/>
+        </p:spPr>
+        <p:style>
+          <a:lnRef idx="1">
+            <a:schemeClr val="accent1"/>
+          </a:lnRef>
+          <a:fillRef idx="3">
+            <a:schemeClr val="accent1"/>
+          </a:fillRef>
+          <a:effectRef idx="2">
+            <a:schemeClr val="accent1"/>
+          </a:effectRef>
+          <a:fontRef idx="minor">
+            <a:schemeClr val="lt1"/>
+          </a:fontRef>
+        </p:style>
+        <p:txBody>
+          <a:bodyPr rtlCol="0" anchor="ctr"/>
+          <a:lstStyle/>
+          <a:p>
+            <a:pPr algn="ctr"/>
+          </a:p>
+        </p:txBody>
+      </p:sp>
+      <p:sp>
+        <p:nvSpPr>
+          <p:cNvPr id="25" name="TextBox 24"/>
+          <p:cNvSpPr txBox="1"/>
+          <p:nvPr/>
+        </p:nvSpPr>
+        <p:spPr>
+          <a:xfrm>
+            <a:off x="11131803" y="2626614"/>
+            <a:ext cx="453644" cy="237744"/>
+          </a:xfrm>
+          <a:prstGeom prst="rect">
+            <a:avLst/>
+          </a:prstGeom>
+          <a:noFill/>
+        </p:spPr>
+        <p:txBody>
+          <a:bodyPr wrap="square" anchor="ctr" lIns="0" rIns="0" tIns="0" bIns="0">
+            <a:spAutoFit/>
+          </a:bodyPr>
+          <a:lstStyle/>
+          <a:p>
+            <a:pPr algn="ctr">
+              <a:lnSpc>
+                <a:spcPct val="114000"/>
+              </a:lnSpc>
+            </a:pPr>
+            <a:r>
+              <a:rPr sz="850" b="1">
+                <a:solidFill>
+                  <a:srgbClr val="FFFFFF"/>
+                </a:solidFill>
+              </a:rPr>
+              <a:t>达标</a:t>
+            </a:r>
+          </a:p>
+        </p:txBody>
+      </p:sp>
+      <p:sp>
+        <p:nvSpPr>
+          <p:cNvPr id="26" name="TextBox 25"/>
+          <p:cNvSpPr txBox="1"/>
+          <p:nvPr/>
+        </p:nvSpPr>
+        <p:spPr>
+          <a:xfrm>
+            <a:off x="932688" y="2882646"/>
+            <a:ext cx="10671047" cy="514350"/>
+          </a:xfrm>
+          <a:prstGeom prst="rect">
+            <a:avLst/>
+          </a:prstGeom>
+          <a:noFill/>
+        </p:spPr>
+        <p:txBody>
+          <a:bodyPr wrap="square" anchor="t" lIns="0" rIns="0" tIns="0" bIns="0">
+            <a:spAutoFit/>
+          </a:bodyPr>
+          <a:lstStyle/>
+          <a:p>
+            <a:pPr algn="l">
+              <a:lnSpc>
+                <a:spcPct val="114000"/>
+              </a:lnSpc>
+            </a:pPr>
+            <a:r>
+              <a:rPr sz="950" b="0">
+                <a:solidFill>
+                  <a:srgbClr val="1B2B28"/>
+                </a:solidFill>
+              </a:rPr>
+              <a:t>1000 窗 ≤ C 档线 100 ms（config: perf.target_ms，实测毫秒只写 runtime/timing.json 以免破坏 output/ 逐字节复现）｜特征字典 35 条物理含义空白 0 条</a:t>
+            </a:r>
+          </a:p>
+        </p:txBody>
+      </p:sp>
+      <p:sp>
+        <p:nvSpPr>
+          <p:cNvPr id="27" name="Rounded Rectangle 26"/>
+          <p:cNvSpPr/>
+          <p:nvPr/>
+        </p:nvSpPr>
+        <p:spPr>
+          <a:xfrm>
+            <a:off x="475488" y="3515868"/>
+            <a:ext cx="11237976" cy="916686"/>
+          </a:xfrm>
+          <a:prstGeom prst="roundRect">
+            <a:avLst>
+              <a:gd name="adj" fmla="val 6000"/>
+            </a:avLst>
+          </a:prstGeom>
+          <a:solidFill>
+            <a:srgbClr val="FFFFFF"/>
+          </a:solidFill>
+          <a:ln w="9525">
+            <a:solidFill>
+              <a:srgbClr val="E4F1EE"/>
+            </a:solidFill>
+          </a:ln>
+          <a:effectLst/>
+        </p:spPr>
+        <p:style>
+          <a:lnRef idx="1">
+            <a:schemeClr val="accent1"/>
+          </a:lnRef>
+          <a:fillRef idx="3">
+            <a:schemeClr val="accent1"/>
+          </a:fillRef>
+          <a:effectRef idx="2">
+            <a:schemeClr val="accent1"/>
+          </a:effectRef>
+          <a:fontRef idx="minor">
+            <a:schemeClr val="lt1"/>
+          </a:fontRef>
+        </p:style>
+        <p:txBody>
+          <a:bodyPr rtlCol="0" anchor="ctr"/>
+          <a:lstStyle/>
+          <a:p>
+            <a:pPr algn="ctr"/>
+          </a:p>
+        </p:txBody>
+      </p:sp>
+      <p:sp>
+        <p:nvSpPr>
+          <p:cNvPr id="28" name="Rounded Rectangle 27"/>
+          <p:cNvSpPr/>
+          <p:nvPr/>
+        </p:nvSpPr>
+        <p:spPr>
+          <a:xfrm>
+            <a:off x="475488" y="3515868"/>
+            <a:ext cx="54864" cy="916686"/>
+          </a:xfrm>
+          <a:prstGeom prst="roundRect">
+            <a:avLst>
+              <a:gd name="adj" fmla="val 50000"/>
+            </a:avLst>
+          </a:prstGeom>
+          <a:solidFill>
+            <a:srgbClr val="0B5E54"/>
+          </a:solidFill>
+          <a:ln>
+            <a:noFill/>
+          </a:ln>
+          <a:effectLst/>
+        </p:spPr>
+        <p:style>
+          <a:lnRef idx="1">
+            <a:schemeClr val="accent1"/>
+          </a:lnRef>
+          <a:fillRef idx="3">
+            <a:schemeClr val="accent1"/>
+          </a:fillRef>
+          <a:effectRef idx="2">
+            <a:schemeClr val="accent1"/>
+          </a:effectRef>
+          <a:fontRef idx="minor">
+            <a:schemeClr val="lt1"/>
+          </a:fontRef>
+        </p:style>
+        <p:txBody>
+          <a:bodyPr rtlCol="0" anchor="ctr"/>
+          <a:lstStyle/>
+          <a:p>
+            <a:pPr algn="ctr"/>
+          </a:p>
+        </p:txBody>
+      </p:sp>
+      <p:sp>
+        <p:nvSpPr>
+          <p:cNvPr id="29" name="Rounded Rectangle 28"/>
+          <p:cNvSpPr/>
+          <p:nvPr/>
+        </p:nvSpPr>
+        <p:spPr>
+          <a:xfrm>
+            <a:off x="621792" y="3598163"/>
+            <a:ext cx="237744" cy="237744"/>
+          </a:xfrm>
+          <a:prstGeom prst="roundRect">
+            <a:avLst>
+              <a:gd name="adj" fmla="val 28000"/>
+            </a:avLst>
+          </a:prstGeom>
+          <a:solidFill>
+            <a:srgbClr val="0B5E54"/>
+          </a:solidFill>
+          <a:ln>
+            <a:noFill/>
+          </a:ln>
+          <a:effectLst/>
+        </p:spPr>
+        <p:style>
+          <a:lnRef idx="1">
+            <a:schemeClr val="accent1"/>
+          </a:lnRef>
+          <a:fillRef idx="3">
+            <a:schemeClr val="accent1"/>
+          </a:fillRef>
+          <a:effectRef idx="2">
+            <a:schemeClr val="accent1"/>
+          </a:effectRef>
+          <a:fontRef idx="minor">
+            <a:schemeClr val="lt1"/>
+          </a:fontRef>
+        </p:style>
+        <p:txBody>
+          <a:bodyPr rtlCol="0" anchor="ctr"/>
+          <a:lstStyle/>
+          <a:p>
+            <a:pPr algn="ctr"/>
+          </a:p>
+        </p:txBody>
+      </p:sp>
+      <p:sp>
+        <p:nvSpPr>
+          <p:cNvPr id="30" name="TextBox 29"/>
+          <p:cNvSpPr txBox="1"/>
+          <p:nvPr/>
+        </p:nvSpPr>
+        <p:spPr>
+          <a:xfrm>
+            <a:off x="621792" y="3598163"/>
+            <a:ext cx="237744" cy="237744"/>
+          </a:xfrm>
+          <a:prstGeom prst="rect">
+            <a:avLst/>
+          </a:prstGeom>
+          <a:noFill/>
+        </p:spPr>
+        <p:txBody>
+          <a:bodyPr wrap="square" anchor="ctr" lIns="0" rIns="0" tIns="0" bIns="0">
+            <a:spAutoFit/>
+          </a:bodyPr>
+          <a:lstStyle/>
+          <a:p>
+            <a:pPr algn="ctr">
+              <a:lnSpc>
+                <a:spcPct val="114000"/>
+              </a:lnSpc>
+            </a:pPr>
+            <a:r>
+              <a:rPr sz="1000" b="1">
+                <a:solidFill>
+                  <a:srgbClr val="FFFFFF"/>
+                </a:solidFill>
+              </a:rPr>
+              <a:t>B</a:t>
+            </a:r>
+          </a:p>
+        </p:txBody>
+      </p:sp>
+      <p:sp>
+        <p:nvSpPr>
+          <p:cNvPr id="31" name="TextBox 30"/>
+          <p:cNvSpPr txBox="1"/>
+          <p:nvPr/>
+        </p:nvSpPr>
+        <p:spPr>
+          <a:xfrm>
+            <a:off x="932688" y="3579875"/>
+            <a:ext cx="8778240" cy="274320"/>
+          </a:xfrm>
+          <a:prstGeom prst="rect">
+            <a:avLst/>
+          </a:prstGeom>
+          <a:noFill/>
+        </p:spPr>
+        <p:txBody>
+          <a:bodyPr wrap="square" anchor="ctr" lIns="0" rIns="0" tIns="0" bIns="0">
+            <a:spAutoFit/>
+          </a:bodyPr>
+          <a:lstStyle/>
+          <a:p>
+            <a:pPr algn="l">
+              <a:lnSpc>
+                <a:spcPct val="114000"/>
+              </a:lnSpc>
+            </a:pPr>
+            <a:r>
+              <a:rPr sz="1050" b="1">
+                <a:solidFill>
+                  <a:srgbClr val="1B2B28"/>
+                </a:solidFill>
+              </a:rPr>
+              <a:t>优秀</a:t>
+            </a:r>
+            <a:r>
+              <a:rPr sz="850" b="0">
+                <a:solidFill>
+                  <a:srgbClr val="5C6E6A"/>
+                </a:solidFill>
+              </a:rPr>
+              <a:t>   验收口径：</a:t>
+            </a:r>
+            <a:r>
+              <a:rPr sz="850" b="0">
+                <a:solidFill>
+                  <a:srgbClr val="5C6E6A"/>
+                </a:solidFill>
+              </a:rPr>
+              <a:t>&lt;50ms；广播运用充分；箱线图输出；文档完整</a:t>
+            </a:r>
+          </a:p>
+        </p:txBody>
+      </p:sp>
+      <p:sp>
+        <p:nvSpPr>
+          <p:cNvPr id="32" name="Rounded Rectangle 31"/>
+          <p:cNvSpPr/>
+          <p:nvPr/>
+        </p:nvSpPr>
+        <p:spPr>
+          <a:xfrm>
+            <a:off x="10532681" y="3607308"/>
+            <a:ext cx="1052766" cy="237744"/>
+          </a:xfrm>
+          <a:prstGeom prst="roundRect">
+            <a:avLst>
+              <a:gd name="adj" fmla="val 50000"/>
+            </a:avLst>
+          </a:prstGeom>
+          <a:solidFill>
+            <a:srgbClr val="C9A227"/>
+          </a:solidFill>
+          <a:ln>
+            <a:noFill/>
+          </a:ln>
+          <a:effectLst/>
+        </p:spPr>
+        <p:style>
+          <a:lnRef idx="1">
+            <a:schemeClr val="accent1"/>
+          </a:lnRef>
+          <a:fillRef idx="3">
+            <a:schemeClr val="accent1"/>
+          </a:fillRef>
+          <a:effectRef idx="2">
+            <a:schemeClr val="accent1"/>
+          </a:effectRef>
+          <a:fontRef idx="minor">
+            <a:schemeClr val="lt1"/>
+          </a:fontRef>
+        </p:style>
+        <p:txBody>
+          <a:bodyPr rtlCol="0" anchor="ctr"/>
+          <a:lstStyle/>
+          <a:p>
+            <a:pPr algn="ctr"/>
+          </a:p>
+        </p:txBody>
+      </p:sp>
+      <p:sp>
+        <p:nvSpPr>
+          <p:cNvPr id="33" name="TextBox 32"/>
+          <p:cNvSpPr txBox="1"/>
+          <p:nvPr/>
+        </p:nvSpPr>
+        <p:spPr>
+          <a:xfrm>
+            <a:off x="10532681" y="3607308"/>
+            <a:ext cx="1052766" cy="237744"/>
+          </a:xfrm>
+          <a:prstGeom prst="rect">
+            <a:avLst/>
+          </a:prstGeom>
+          <a:noFill/>
+        </p:spPr>
+        <p:txBody>
+          <a:bodyPr wrap="square" anchor="ctr" lIns="0" rIns="0" tIns="0" bIns="0">
+            <a:spAutoFit/>
+          </a:bodyPr>
+          <a:lstStyle/>
+          <a:p>
+            <a:pPr algn="ctr">
+              <a:lnSpc>
+                <a:spcPct val="114000"/>
+              </a:lnSpc>
+            </a:pPr>
+            <a:r>
+              <a:rPr sz="850" b="1">
+                <a:solidFill>
+                  <a:srgbClr val="FFFFFF"/>
+                </a:solidFill>
+              </a:rPr>
+              <a:t>本节实测项 通过</a:t>
+            </a:r>
+          </a:p>
+        </p:txBody>
+      </p:sp>
+      <p:sp>
+        <p:nvSpPr>
+          <p:cNvPr id="34" name="TextBox 33"/>
+          <p:cNvSpPr txBox="1"/>
+          <p:nvPr/>
+        </p:nvSpPr>
+        <p:spPr>
+          <a:xfrm>
+            <a:off x="932688" y="3863339"/>
+            <a:ext cx="10671047" cy="514350"/>
+          </a:xfrm>
+          <a:prstGeom prst="rect">
+            <a:avLst/>
+          </a:prstGeom>
+          <a:noFill/>
+        </p:spPr>
+        <p:txBody>
+          <a:bodyPr wrap="square" anchor="t" lIns="0" rIns="0" tIns="0" bIns="0">
+            <a:spAutoFit/>
+          </a:bodyPr>
+          <a:lstStyle/>
+          <a:p>
+            <a:pPr algn="l">
+              <a:lnSpc>
+                <a:spcPct val="114000"/>
+              </a:lnSpc>
+            </a:pPr>
+            <a:r>
+              <a:rPr sz="950" b="0">
+                <a:solidFill>
+                  <a:srgbClr val="1B2B28"/>
+                </a:solidFill>
+              </a:rPr>
+              <a:t>实测 ≤ B 档线 50 ms（config: perf.excellent_ms）｜箱线图 output/boxplot.png｜docs/ 过程文档 8 篇</a:t>
+            </a:r>
+          </a:p>
+        </p:txBody>
+      </p:sp>
+      <p:sp>
+        <p:nvSpPr>
+          <p:cNvPr id="35" name="Rounded Rectangle 34"/>
+          <p:cNvSpPr/>
+          <p:nvPr/>
+        </p:nvSpPr>
+        <p:spPr>
+          <a:xfrm>
+            <a:off x="475488" y="4496562"/>
+            <a:ext cx="11237976" cy="916686"/>
+          </a:xfrm>
+          <a:prstGeom prst="roundRect">
+            <a:avLst>
+              <a:gd name="adj" fmla="val 6000"/>
+            </a:avLst>
+          </a:prstGeom>
+          <a:solidFill>
+            <a:srgbClr val="FFFFFF"/>
+          </a:solidFill>
+          <a:ln w="9525">
+            <a:solidFill>
+              <a:srgbClr val="E4F1EE"/>
+            </a:solidFill>
+          </a:ln>
+          <a:effectLst/>
+        </p:spPr>
+        <p:style>
+          <a:lnRef idx="1">
+            <a:schemeClr val="accent1"/>
+          </a:lnRef>
+          <a:fillRef idx="3">
+            <a:schemeClr val="accent1"/>
+          </a:fillRef>
+          <a:effectRef idx="2">
+            <a:schemeClr val="accent1"/>
+          </a:effectRef>
+          <a:fontRef idx="minor">
+            <a:schemeClr val="lt1"/>
+          </a:fontRef>
+        </p:style>
+        <p:txBody>
+          <a:bodyPr rtlCol="0" anchor="ctr"/>
+          <a:lstStyle/>
+          <a:p>
+            <a:pPr algn="ctr"/>
+          </a:p>
+        </p:txBody>
+      </p:sp>
+      <p:sp>
+        <p:nvSpPr>
+          <p:cNvPr id="36" name="Rounded Rectangle 35"/>
+          <p:cNvSpPr/>
+          <p:nvPr/>
+        </p:nvSpPr>
+        <p:spPr>
+          <a:xfrm>
+            <a:off x="475488" y="4496562"/>
+            <a:ext cx="54864" cy="916686"/>
+          </a:xfrm>
+          <a:prstGeom prst="roundRect">
+            <a:avLst>
+              <a:gd name="adj" fmla="val 50000"/>
+            </a:avLst>
+          </a:prstGeom>
+          <a:solidFill>
+            <a:srgbClr val="C9A227"/>
+          </a:solidFill>
+          <a:ln>
+            <a:noFill/>
+          </a:ln>
+          <a:effectLst/>
+        </p:spPr>
+        <p:style>
+          <a:lnRef idx="1">
+            <a:schemeClr val="accent1"/>
+          </a:lnRef>
+          <a:fillRef idx="3">
+            <a:schemeClr val="accent1"/>
+          </a:fillRef>
+          <a:effectRef idx="2">
+            <a:schemeClr val="accent1"/>
+          </a:effectRef>
+          <a:fontRef idx="minor">
+            <a:schemeClr val="lt1"/>
+          </a:fontRef>
+        </p:style>
+        <p:txBody>
+          <a:bodyPr rtlCol="0" anchor="ctr"/>
+          <a:lstStyle/>
+          <a:p>
+            <a:pPr algn="ctr"/>
+          </a:p>
+        </p:txBody>
+      </p:sp>
+      <p:sp>
+        <p:nvSpPr>
+          <p:cNvPr id="37" name="Rounded Rectangle 36"/>
+          <p:cNvSpPr/>
+          <p:nvPr/>
+        </p:nvSpPr>
+        <p:spPr>
+          <a:xfrm>
+            <a:off x="621792" y="4578857"/>
+            <a:ext cx="237744" cy="237744"/>
+          </a:xfrm>
+          <a:prstGeom prst="roundRect">
+            <a:avLst>
+              <a:gd name="adj" fmla="val 28000"/>
+            </a:avLst>
+          </a:prstGeom>
+          <a:solidFill>
+            <a:srgbClr val="C9A227"/>
+          </a:solidFill>
+          <a:ln>
+            <a:noFill/>
+          </a:ln>
+          <a:effectLst/>
+        </p:spPr>
+        <p:style>
+          <a:lnRef idx="1">
+            <a:schemeClr val="accent1"/>
+          </a:lnRef>
+          <a:fillRef idx="3">
+            <a:schemeClr val="accent1"/>
+          </a:fillRef>
+          <a:effectRef idx="2">
+            <a:schemeClr val="accent1"/>
+          </a:effectRef>
+          <a:fontRef idx="minor">
+            <a:schemeClr val="lt1"/>
+          </a:fontRef>
+        </p:style>
+        <p:txBody>
+          <a:bodyPr rtlCol="0" anchor="ctr"/>
+          <a:lstStyle/>
+          <a:p>
+            <a:pPr algn="ctr"/>
+          </a:p>
+        </p:txBody>
+      </p:sp>
+      <p:sp>
+        <p:nvSpPr>
+          <p:cNvPr id="38" name="TextBox 37"/>
+          <p:cNvSpPr txBox="1"/>
+          <p:nvPr/>
+        </p:nvSpPr>
+        <p:spPr>
+          <a:xfrm>
+            <a:off x="621792" y="4578857"/>
+            <a:ext cx="237744" cy="237744"/>
+          </a:xfrm>
+          <a:prstGeom prst="rect">
+            <a:avLst/>
+          </a:prstGeom>
+          <a:noFill/>
+        </p:spPr>
+        <p:txBody>
+          <a:bodyPr wrap="square" anchor="ctr" lIns="0" rIns="0" tIns="0" bIns="0">
+            <a:spAutoFit/>
+          </a:bodyPr>
+          <a:lstStyle/>
+          <a:p>
+            <a:pPr algn="ctr">
+              <a:lnSpc>
+                <a:spcPct val="114000"/>
+              </a:lnSpc>
+            </a:pPr>
+            <a:r>
+              <a:rPr sz="1000" b="1">
+                <a:solidFill>
+                  <a:srgbClr val="FFFFFF"/>
+                </a:solidFill>
+              </a:rPr>
+              <a:t>A</a:t>
+            </a:r>
+          </a:p>
+        </p:txBody>
+      </p:sp>
+      <p:sp>
+        <p:nvSpPr>
+          <p:cNvPr id="39" name="TextBox 38"/>
+          <p:cNvSpPr txBox="1"/>
+          <p:nvPr/>
+        </p:nvSpPr>
+        <p:spPr>
+          <a:xfrm>
+            <a:off x="932688" y="4560570"/>
+            <a:ext cx="8778240" cy="274320"/>
+          </a:xfrm>
+          <a:prstGeom prst="rect">
+            <a:avLst/>
+          </a:prstGeom>
+          <a:noFill/>
+        </p:spPr>
+        <p:txBody>
+          <a:bodyPr wrap="square" anchor="ctr" lIns="0" rIns="0" tIns="0" bIns="0">
+            <a:spAutoFit/>
+          </a:bodyPr>
+          <a:lstStyle/>
+          <a:p>
+            <a:pPr algn="l">
+              <a:lnSpc>
+                <a:spcPct val="114000"/>
+              </a:lnSpc>
+            </a:pPr>
+            <a:r>
+              <a:rPr sz="1050" b="1">
+                <a:solidFill>
+                  <a:srgbClr val="1B2B28"/>
+                </a:solidFill>
+              </a:rPr>
+              <a:t>超优</a:t>
+            </a:r>
+            <a:r>
+              <a:rPr sz="850" b="0">
+                <a:solidFill>
+                  <a:srgbClr val="5C6E6A"/>
+                </a:solidFill>
+              </a:rPr>
+              <a:t>   验收口径：</a:t>
+            </a:r>
+            <a:r>
+              <a:rPr sz="850" b="0">
+                <a:solidFill>
+                  <a:srgbClr val="5C6E6A"/>
+                </a:solidFill>
+              </a:rPr>
+              <a:t>优秀+衍生特征5个+相关性特征选择(去冗余)</a:t>
+            </a:r>
+          </a:p>
+        </p:txBody>
+      </p:sp>
+      <p:sp>
+        <p:nvSpPr>
+          <p:cNvPr id="40" name="Rounded Rectangle 39"/>
+          <p:cNvSpPr/>
+          <p:nvPr/>
+        </p:nvSpPr>
+        <p:spPr>
+          <a:xfrm>
+            <a:off x="10532681" y="4588001"/>
+            <a:ext cx="1052766" cy="237744"/>
+          </a:xfrm>
+          <a:prstGeom prst="roundRect">
+            <a:avLst>
+              <a:gd name="adj" fmla="val 50000"/>
+            </a:avLst>
+          </a:prstGeom>
+          <a:solidFill>
+            <a:srgbClr val="C9A227"/>
+          </a:solidFill>
+          <a:ln>
+            <a:noFill/>
+          </a:ln>
+          <a:effectLst/>
+        </p:spPr>
+        <p:style>
+          <a:lnRef idx="1">
+            <a:schemeClr val="accent1"/>
+          </a:lnRef>
+          <a:fillRef idx="3">
+            <a:schemeClr val="accent1"/>
+          </a:fillRef>
+          <a:effectRef idx="2">
+            <a:schemeClr val="accent1"/>
+          </a:effectRef>
+          <a:fontRef idx="minor">
+            <a:schemeClr val="lt1"/>
+          </a:fontRef>
+        </p:style>
+        <p:txBody>
+          <a:bodyPr rtlCol="0" anchor="ctr"/>
+          <a:lstStyle/>
+          <a:p>
+            <a:pPr algn="ctr"/>
+          </a:p>
+        </p:txBody>
+      </p:sp>
+      <p:sp>
+        <p:nvSpPr>
+          <p:cNvPr id="41" name="TextBox 40"/>
+          <p:cNvSpPr txBox="1"/>
+          <p:nvPr/>
+        </p:nvSpPr>
+        <p:spPr>
+          <a:xfrm>
+            <a:off x="10532681" y="4588001"/>
+            <a:ext cx="1052766" cy="237744"/>
+          </a:xfrm>
+          <a:prstGeom prst="rect">
+            <a:avLst/>
+          </a:prstGeom>
+          <a:noFill/>
+        </p:spPr>
+        <p:txBody>
+          <a:bodyPr wrap="square" anchor="ctr" lIns="0" rIns="0" tIns="0" bIns="0">
+            <a:spAutoFit/>
+          </a:bodyPr>
+          <a:lstStyle/>
+          <a:p>
+            <a:pPr algn="ctr">
+              <a:lnSpc>
+                <a:spcPct val="114000"/>
+              </a:lnSpc>
+            </a:pPr>
+            <a:r>
+              <a:rPr sz="850" b="1">
+                <a:solidFill>
+                  <a:srgbClr val="FFFFFF"/>
+                </a:solidFill>
+              </a:rPr>
+              <a:t>本节实测项 通过</a:t>
+            </a:r>
+          </a:p>
+        </p:txBody>
+      </p:sp>
+      <p:sp>
+        <p:nvSpPr>
+          <p:cNvPr id="42" name="TextBox 41"/>
+          <p:cNvSpPr txBox="1"/>
+          <p:nvPr/>
+        </p:nvSpPr>
+        <p:spPr>
+          <a:xfrm>
+            <a:off x="932688" y="4844033"/>
+            <a:ext cx="10671047" cy="514350"/>
+          </a:xfrm>
+          <a:prstGeom prst="rect">
+            <a:avLst/>
+          </a:prstGeom>
+          <a:noFill/>
+        </p:spPr>
+        <p:txBody>
+          <a:bodyPr wrap="square" anchor="t" lIns="0" rIns="0" tIns="0" bIns="0">
+            <a:spAutoFit/>
+          </a:bodyPr>
+          <a:lstStyle/>
+          <a:p>
+            <a:pPr algn="l">
+              <a:lnSpc>
+                <a:spcPct val="114000"/>
+              </a:lnSpc>
+            </a:pPr>
+            <a:r>
+              <a:rPr sz="950" b="0">
+                <a:solidFill>
+                  <a:srgbClr val="1B2B28"/>
+                </a:solidFill>
+              </a:rPr>
+              <a:t>前置优秀档=达标｜衍生 5/5 列｜去冗余 保留 19 + 剔除 11 = 主特征 30（分区完整=True）｜剔除项均带 kept 赢家与 |r| 证据=True</a:t>
+            </a:r>
+          </a:p>
+        </p:txBody>
+      </p:sp>
+      <p:sp>
+        <p:nvSpPr>
+          <p:cNvPr id="43" name="Rounded Rectangle 42"/>
+          <p:cNvSpPr/>
+          <p:nvPr/>
+        </p:nvSpPr>
+        <p:spPr>
+          <a:xfrm>
+            <a:off x="475488" y="5477255"/>
+            <a:ext cx="11237976" cy="941832"/>
+          </a:xfrm>
+          <a:prstGeom prst="roundRect">
+            <a:avLst>
+              <a:gd name="adj" fmla="val 5000"/>
+            </a:avLst>
+          </a:prstGeom>
+          <a:solidFill>
+            <a:srgbClr val="E4F1EE"/>
+          </a:solidFill>
+          <a:ln>
+            <a:noFill/>
+          </a:ln>
+          <a:effectLst/>
+        </p:spPr>
+        <p:style>
+          <a:lnRef idx="1">
+            <a:schemeClr val="accent1"/>
+          </a:lnRef>
+          <a:fillRef idx="3">
+            <a:schemeClr val="accent1"/>
+          </a:fillRef>
+          <a:effectRef idx="2">
+            <a:schemeClr val="accent1"/>
+          </a:effectRef>
+          <a:fontRef idx="minor">
+            <a:schemeClr val="lt1"/>
+          </a:fontRef>
+        </p:style>
+        <p:txBody>
+          <a:bodyPr rtlCol="0" anchor="ctr"/>
+          <a:lstStyle/>
+          <a:p>
+            <a:pPr algn="ctr"/>
+          </a:p>
+        </p:txBody>
+      </p:sp>
+      <p:sp>
+        <p:nvSpPr>
+          <p:cNvPr id="44" name="Rounded Rectangle 43"/>
+          <p:cNvSpPr/>
+          <p:nvPr/>
+        </p:nvSpPr>
+        <p:spPr>
+          <a:xfrm>
+            <a:off x="475488" y="5477255"/>
+            <a:ext cx="54864" cy="941832"/>
+          </a:xfrm>
+          <a:prstGeom prst="roundRect">
+            <a:avLst>
+              <a:gd name="adj" fmla="val 50000"/>
+            </a:avLst>
+          </a:prstGeom>
+          <a:solidFill>
+            <a:srgbClr val="C9A227"/>
+          </a:solidFill>
+          <a:ln>
+            <a:noFill/>
+          </a:ln>
+          <a:effectLst/>
+        </p:spPr>
+        <p:style>
+          <a:lnRef idx="1">
+            <a:schemeClr val="accent1"/>
+          </a:lnRef>
+          <a:fillRef idx="3">
+            <a:schemeClr val="accent1"/>
+          </a:fillRef>
+          <a:effectRef idx="2">
+            <a:schemeClr val="accent1"/>
+          </a:effectRef>
+          <a:fontRef idx="minor">
+            <a:schemeClr val="lt1"/>
+          </a:fontRef>
+        </p:style>
+        <p:txBody>
+          <a:bodyPr rtlCol="0" anchor="ctr"/>
+          <a:lstStyle/>
+          <a:p>
+            <a:pPr algn="ctr"/>
+          </a:p>
+        </p:txBody>
+      </p:sp>
+      <p:sp>
+        <p:nvSpPr>
+          <p:cNvPr id="45" name="TextBox 44"/>
+          <p:cNvSpPr txBox="1"/>
+          <p:nvPr/>
+        </p:nvSpPr>
+        <p:spPr>
+          <a:xfrm>
+            <a:off x="676656" y="5550407"/>
+            <a:ext cx="10908792" cy="795528"/>
+          </a:xfrm>
+          <a:prstGeom prst="rect">
+            <a:avLst/>
+          </a:prstGeom>
+          <a:noFill/>
+        </p:spPr>
+        <p:txBody>
+          <a:bodyPr wrap="square" anchor="t" lIns="0" rIns="0" tIns="0" bIns="0">
+            <a:spAutoFit/>
+          </a:bodyPr>
+          <a:lstStyle/>
+          <a:p>
+            <a:pPr algn="l">
+              <a:lnSpc>
+                <a:spcPct val="124000"/>
+              </a:lnSpc>
+            </a:pPr>
+            <a:r>
+              <a:rPr sz="850" b="0">
+                <a:solidFill>
+                  <a:srgbClr val="1B2B28"/>
+                </a:solidFill>
+              </a:rPr>
+              <a:t>出处：工程化项目/p22_feature_factory/output/report.txt 第 76 节「工单验收四档对照」——本机 2026-10-28 05:08 实跑落盘，上表数字逐字摘录、未改写。</a:t>
+            </a:r>
+          </a:p>
+          <a:p>
+            <a:pPr algn="l">
+              <a:lnSpc>
+                <a:spcPct val="124000"/>
+              </a:lnSpc>
+            </a:pPr>
+            <a:r>
+              <a:rPr sz="850" b="0">
+                <a:solidFill>
+                  <a:srgbClr val="1B2B28"/>
+                </a:solidFill>
+              </a:rPr>
+              <a:t>复现：cd 工程化项目/p22_feature_factory &amp;&amp; python run.py &amp;&amp; python -m pytest -q -o addopts=''</a:t>
+            </a:r>
+          </a:p>
+          <a:p>
+            <a:pPr algn="l">
+              <a:lnSpc>
+                <a:spcPct val="124000"/>
+              </a:lnSpc>
+            </a:pPr>
+            <a:r>
+              <a:rPr sz="850" b="0">
+                <a:solidFill>
+                  <a:srgbClr val="1B2B28"/>
+                </a:solidFill>
+              </a:rPr>
+              <a:t>口径：表中「判定」沿用报告原词——绿=达标/通过，黄=仅本节取证项通过（未取证子项在报告里逐条点名），红=未达标。</a:t>
+            </a:r>
+          </a:p>
+        </p:txBody>
+      </p:sp>
+    </p:spTree>
+  </p:cSld>
+  <p:clrMapOvr>
+    <a:masterClrMapping/>
+  </p:clrMapOvr>
+</p:sld>
+</file>
+
+<file path=ppt/slides/slide64.xml><?xml version="1.0" encoding="utf-8"?>
+<p:sld xmlns:a="http://schemas.openxmlformats.org/drawingml/2006/main" xmlns:p="http://schemas.openxmlformats.org/presentationml/2006/main" xmlns:r="http://schemas.openxmlformats.org/officeDocument/2006/relationships">
+  <p:cSld>
+    <p:spTree>
+      <p:nvGrpSpPr>
+        <p:cNvPr id="1" name=""/>
+        <p:cNvGrpSpPr/>
+        <p:nvPr/>
+      </p:nvGrpSpPr>
+      <p:grpSpPr/>
+      <p:sp>
+        <p:nvSpPr>
+          <p:cNvPr id="2" name="Rounded Rectangle 1"/>
+          <p:cNvSpPr/>
+          <p:nvPr/>
+        </p:nvSpPr>
+        <p:spPr>
+          <a:xfrm>
+            <a:off x="0" y="0"/>
+            <a:ext cx="12191695" cy="64008"/>
+          </a:xfrm>
+          <a:prstGeom prst="roundRect">
+            <a:avLst>
+              <a:gd name="adj" fmla="val 50000"/>
+            </a:avLst>
+          </a:prstGeom>
+          <a:solidFill>
+            <a:srgbClr val="0B5E54"/>
+          </a:solidFill>
+          <a:ln>
+            <a:noFill/>
+          </a:ln>
+          <a:effectLst/>
+        </p:spPr>
+        <p:style>
+          <a:lnRef idx="1">
+            <a:schemeClr val="accent1"/>
+          </a:lnRef>
+          <a:fillRef idx="3">
+            <a:schemeClr val="accent1"/>
+          </a:fillRef>
+          <a:effectRef idx="2">
+            <a:schemeClr val="accent1"/>
+          </a:effectRef>
+          <a:fontRef idx="minor">
+            <a:schemeClr val="lt1"/>
+          </a:fontRef>
+        </p:style>
+        <p:txBody>
+          <a:bodyPr rtlCol="0" anchor="ctr"/>
+          <a:lstStyle/>
+          <a:p>
+            <a:pPr algn="ctr"/>
+          </a:p>
+        </p:txBody>
+      </p:sp>
+      <p:sp>
+        <p:nvSpPr>
+          <p:cNvPr id="3" name="TextBox 2"/>
+          <p:cNvSpPr txBox="1"/>
+          <p:nvPr/>
+        </p:nvSpPr>
+        <p:spPr>
+          <a:xfrm>
+            <a:off x="475488" y="146304"/>
+            <a:ext cx="8229600" cy="292608"/>
+          </a:xfrm>
+          <a:prstGeom prst="rect">
+            <a:avLst/>
+          </a:prstGeom>
+          <a:noFill/>
+        </p:spPr>
+        <p:txBody>
+          <a:bodyPr wrap="square" anchor="t" lIns="0" rIns="0" tIns="0" bIns="0">
+            <a:spAutoFit/>
+          </a:bodyPr>
+          <a:lstStyle/>
+          <a:p>
+            <a:pPr algn="l">
+              <a:lnSpc>
+                <a:spcPct val="114000"/>
+              </a:lnSpc>
+            </a:pPr>
+            <a:r>
+              <a:rPr sz="1100" b="1">
+                <a:solidFill>
+                  <a:srgbClr val="0B5E54"/>
+                </a:solidFill>
+              </a:rPr>
+              <a:t>工单实战 · 运行留证</a:t>
+            </a:r>
+          </a:p>
+        </p:txBody>
+      </p:sp>
+      <p:sp>
+        <p:nvSpPr>
+          <p:cNvPr id="4" name="Rounded Rectangle 3"/>
+          <p:cNvSpPr/>
+          <p:nvPr/>
+        </p:nvSpPr>
+        <p:spPr>
+          <a:xfrm>
+            <a:off x="475488" y="475488"/>
+            <a:ext cx="2027872" cy="310896"/>
+          </a:xfrm>
+          <a:prstGeom prst="roundRect">
+            <a:avLst>
+              <a:gd name="adj" fmla="val 50000"/>
+            </a:avLst>
+          </a:prstGeom>
+          <a:solidFill>
+            <a:srgbClr val="C9A227"/>
+          </a:solidFill>
+          <a:ln>
+            <a:noFill/>
+          </a:ln>
+          <a:effectLst/>
+        </p:spPr>
+        <p:style>
+          <a:lnRef idx="1">
+            <a:schemeClr val="accent1"/>
+          </a:lnRef>
+          <a:fillRef idx="3">
+            <a:schemeClr val="accent1"/>
+          </a:fillRef>
+          <a:effectRef idx="2">
+            <a:schemeClr val="accent1"/>
+          </a:effectRef>
+          <a:fontRef idx="minor">
+            <a:schemeClr val="lt1"/>
+          </a:fontRef>
+        </p:style>
+        <p:txBody>
+          <a:bodyPr rtlCol="0" anchor="ctr"/>
+          <a:lstStyle/>
+          <a:p>
+            <a:pPr algn="ctr"/>
+          </a:p>
+        </p:txBody>
+      </p:sp>
+      <p:sp>
+        <p:nvSpPr>
+          <p:cNvPr id="5" name="TextBox 4"/>
+          <p:cNvSpPr txBox="1"/>
+          <p:nvPr/>
+        </p:nvSpPr>
+        <p:spPr>
+          <a:xfrm>
+            <a:off x="475488" y="475488"/>
+            <a:ext cx="2027872" cy="310896"/>
+          </a:xfrm>
+          <a:prstGeom prst="rect">
+            <a:avLst/>
+          </a:prstGeom>
+          <a:noFill/>
+        </p:spPr>
+        <p:txBody>
+          <a:bodyPr wrap="square" anchor="ctr" lIns="0" rIns="0" tIns="0" bIns="0">
+            <a:spAutoFit/>
+          </a:bodyPr>
+          <a:lstStyle/>
+          <a:p>
+            <a:pPr algn="ctr">
+              <a:lnSpc>
+                <a:spcPct val="114000"/>
+              </a:lnSpc>
+            </a:pPr>
+            <a:r>
+              <a:rPr sz="1050" b="1">
+                <a:solidFill>
+                  <a:srgbClr val="FFFFFF"/>
+                </a:solidFill>
+              </a:rPr>
+              <a:t>SCREENSHOT · 终端逐字截图</a:t>
+            </a:r>
+          </a:p>
+        </p:txBody>
+      </p:sp>
+      <p:sp>
+        <p:nvSpPr>
+          <p:cNvPr id="6" name="TextBox 5"/>
+          <p:cNvSpPr txBox="1"/>
+          <p:nvPr/>
+        </p:nvSpPr>
+        <p:spPr>
+          <a:xfrm>
+            <a:off x="475488" y="859536"/>
+            <a:ext cx="11237976" cy="502920"/>
+          </a:xfrm>
+          <a:prstGeom prst="rect">
+            <a:avLst/>
+          </a:prstGeom>
+          <a:noFill/>
+        </p:spPr>
+        <p:txBody>
+          <a:bodyPr wrap="square" anchor="t" lIns="0" rIns="0" tIns="0" bIns="0">
+            <a:spAutoFit/>
+          </a:bodyPr>
+          <a:lstStyle/>
+          <a:p>
+            <a:pPr algn="l">
+              <a:lnSpc>
+                <a:spcPct val="114000"/>
+              </a:lnSpc>
+            </a:pPr>
+            <a:r>
+              <a:rPr sz="2200" b="1">
+                <a:solidFill>
+                  <a:srgbClr val="1B2B28"/>
+                </a:solidFill>
+              </a:rPr>
+              <a:t>P2.2 工单验收四档对照 · 四档逐字输出截图</a:t>
+            </a:r>
+          </a:p>
+        </p:txBody>
+      </p:sp>
+      <p:sp>
+        <p:nvSpPr>
+          <p:cNvPr id="7" name="Rounded Rectangle 6"/>
+          <p:cNvSpPr/>
+          <p:nvPr/>
+        </p:nvSpPr>
+        <p:spPr>
+          <a:xfrm>
+            <a:off x="475488" y="1389888"/>
+            <a:ext cx="1234440" cy="27432"/>
+          </a:xfrm>
+          <a:prstGeom prst="roundRect">
+            <a:avLst>
+              <a:gd name="adj" fmla="val 50000"/>
+            </a:avLst>
+          </a:prstGeom>
+          <a:solidFill>
+            <a:srgbClr val="C9A227"/>
+          </a:solidFill>
+          <a:ln>
+            <a:noFill/>
+          </a:ln>
+          <a:effectLst/>
+        </p:spPr>
+        <p:style>
+          <a:lnRef idx="1">
+            <a:schemeClr val="accent1"/>
+          </a:lnRef>
+          <a:fillRef idx="3">
+            <a:schemeClr val="accent1"/>
+          </a:fillRef>
+          <a:effectRef idx="2">
+            <a:schemeClr val="accent1"/>
+          </a:effectRef>
+          <a:fontRef idx="minor">
+            <a:schemeClr val="lt1"/>
+          </a:fontRef>
+        </p:style>
+        <p:txBody>
+          <a:bodyPr rtlCol="0" anchor="ctr"/>
+          <a:lstStyle/>
+          <a:p>
+            <a:pPr algn="ctr"/>
+          </a:p>
+        </p:txBody>
+      </p:sp>
+      <p:sp>
+        <p:nvSpPr>
+          <p:cNvPr id="8" name="Rounded Rectangle 7"/>
+          <p:cNvSpPr/>
+          <p:nvPr/>
+        </p:nvSpPr>
+        <p:spPr>
+          <a:xfrm>
+            <a:off x="475488" y="6419088"/>
+            <a:ext cx="11237976" cy="10972"/>
+          </a:xfrm>
+          <a:prstGeom prst="roundRect">
+            <a:avLst>
+              <a:gd name="adj" fmla="val 50000"/>
+            </a:avLst>
+          </a:prstGeom>
+          <a:solidFill>
+            <a:srgbClr val="E4F1EE"/>
+          </a:solidFill>
+          <a:ln>
+            <a:noFill/>
+          </a:ln>
+          <a:effectLst/>
+        </p:spPr>
+        <p:style>
+          <a:lnRef idx="1">
+            <a:schemeClr val="accent1"/>
+          </a:lnRef>
+          <a:fillRef idx="3">
+            <a:schemeClr val="accent1"/>
+          </a:fillRef>
+          <a:effectRef idx="2">
+            <a:schemeClr val="accent1"/>
+          </a:effectRef>
+          <a:fontRef idx="minor">
+            <a:schemeClr val="lt1"/>
+          </a:fontRef>
+        </p:style>
+        <p:txBody>
+          <a:bodyPr rtlCol="0" anchor="ctr"/>
+          <a:lstStyle/>
+          <a:p>
+            <a:pPr algn="ctr"/>
+          </a:p>
+        </p:txBody>
+      </p:sp>
+      <p:sp>
+        <p:nvSpPr>
+          <p:cNvPr id="9" name="TextBox 8"/>
+          <p:cNvSpPr txBox="1"/>
+          <p:nvPr/>
+        </p:nvSpPr>
+        <p:spPr>
+          <a:xfrm>
+            <a:off x="475488" y="6455664"/>
+            <a:ext cx="7315200" cy="292608"/>
+          </a:xfrm>
+          <a:prstGeom prst="rect">
+            <a:avLst/>
+          </a:prstGeom>
+          <a:noFill/>
+        </p:spPr>
+        <p:txBody>
+          <a:bodyPr wrap="square" anchor="t" lIns="0" rIns="0" tIns="0" bIns="0">
+            <a:spAutoFit/>
+          </a:bodyPr>
+          <a:lstStyle/>
+          <a:p>
+            <a:pPr algn="l">
+              <a:lnSpc>
+                <a:spcPct val="114000"/>
+              </a:lnSpc>
+            </a:pPr>
+            <a:r>
+              <a:rPr sz="900" b="0">
+                <a:solidFill>
+                  <a:srgbClr val="5C6E6A"/>
+                </a:solidFill>
+              </a:rPr>
+              <a:t>两江智造集团 · Python程序设计（项目实战）</a:t>
+            </a:r>
+          </a:p>
+        </p:txBody>
+      </p:sp>
+      <p:sp>
+        <p:nvSpPr>
+          <p:cNvPr id="10" name="TextBox 9"/>
+          <p:cNvSpPr txBox="1"/>
+          <p:nvPr/>
+        </p:nvSpPr>
+        <p:spPr>
+          <a:xfrm>
+            <a:off x="10597896" y="6537960"/>
+            <a:ext cx="996696" cy="301752"/>
+          </a:xfrm>
+          <a:prstGeom prst="rect">
+            <a:avLst/>
+          </a:prstGeom>
+          <a:noFill/>
+        </p:spPr>
+        <p:txBody>
+          <a:bodyPr wrap="square" anchor="t" lIns="0" rIns="0" tIns="0" bIns="0">
+            <a:spAutoFit/>
+          </a:bodyPr>
+          <a:lstStyle/>
+          <a:p>
+            <a:pPr algn="r">
+              <a:lnSpc>
+                <a:spcPct val="114000"/>
+              </a:lnSpc>
+            </a:pPr>
+            <a:r>
+              <a:rPr sz="1000" b="0">
+                <a:solidFill>
+                  <a:srgbClr val="8A97B5"/>
+                </a:solidFill>
+              </a:rPr>
+              <a:t>48 / 65</a:t>
+            </a:r>
+          </a:p>
+        </p:txBody>
+      </p:sp>
+      <p:sp>
+        <p:nvSpPr>
+          <p:cNvPr id="11" name="TextBox 10"/>
+          <p:cNvSpPr txBox="1"/>
+          <p:nvPr/>
+        </p:nvSpPr>
+        <p:spPr>
+          <a:xfrm>
+            <a:off x="475488" y="1517904"/>
+            <a:ext cx="11237976" cy="237744"/>
+          </a:xfrm>
+          <a:prstGeom prst="rect">
+            <a:avLst/>
+          </a:prstGeom>
+          <a:noFill/>
+        </p:spPr>
+        <p:txBody>
+          <a:bodyPr wrap="square" anchor="t" lIns="0" rIns="0" tIns="0" bIns="0">
+            <a:spAutoFit/>
+          </a:bodyPr>
+          <a:lstStyle/>
+          <a:p>
+            <a:pPr algn="l">
+              <a:lnSpc>
+                <a:spcPct val="114000"/>
+              </a:lnSpc>
+            </a:pPr>
+            <a:r>
+              <a:rPr sz="1000" b="0">
+                <a:solidFill>
+                  <a:srgbClr val="5C6E6A"/>
+                </a:solidFill>
+              </a:rPr>
+              <a:t>终端窗口截图：由 report.txt 本节逐字渲染，未手工改写</a:t>
+            </a:r>
+          </a:p>
+        </p:txBody>
+      </p:sp>
+      <p:pic>
+        <p:nvPicPr>
+          <p:cNvPr id="12" name="Picture 11" descr="p22_feature_factory_workorder.png"/>
+          <p:cNvPicPr>
+            <a:picLocks noChangeAspect="1"/>
+          </p:cNvPicPr>
+          <p:nvPr/>
+        </p:nvPicPr>
+        <p:blipFill>
+          <a:blip r:embed="rId2"/>
+          <a:stretch>
+            <a:fillRect/>
+          </a:stretch>
+        </p:blipFill>
+        <p:spPr>
+          <a:xfrm>
+            <a:off x="475488" y="1823437"/>
+            <a:ext cx="11237976" cy="3787198"/>
+          </a:xfrm>
+          <a:prstGeom prst="rect">
+            <a:avLst/>
+          </a:prstGeom>
+        </p:spPr>
+      </p:pic>
+      <p:sp>
+        <p:nvSpPr>
+          <p:cNvPr id="13" name="TextBox 12"/>
+          <p:cNvSpPr txBox="1"/>
+          <p:nvPr/>
+        </p:nvSpPr>
+        <p:spPr>
+          <a:xfrm>
+            <a:off x="475488" y="5647210"/>
+            <a:ext cx="11237976" cy="256032"/>
+          </a:xfrm>
+          <a:prstGeom prst="rect">
+            <a:avLst/>
+          </a:prstGeom>
+          <a:noFill/>
+        </p:spPr>
+        <p:txBody>
+          <a:bodyPr wrap="square" anchor="t" lIns="0" rIns="0" tIns="0" bIns="0">
+            <a:spAutoFit/>
+          </a:bodyPr>
+          <a:lstStyle/>
+          <a:p>
+            <a:pPr algn="l">
+              <a:lnSpc>
+                <a:spcPct val="114000"/>
+              </a:lnSpc>
+            </a:pPr>
+            <a:r>
+              <a:rPr sz="850" b="0">
+                <a:solidFill>
+                  <a:srgbClr val="5C6E6A"/>
+                </a:solidFill>
+              </a:rPr>
+              <a:t>▲ p22_feature_factory：工单验收四档对照 第 76 行起的四档逐字原文（绿=达标/通过，黄=仅本节取证项，橙=未实测项）</a:t>
+            </a:r>
+          </a:p>
+        </p:txBody>
+      </p:sp>
+    </p:spTree>
+  </p:cSld>
+  <p:clrMapOvr>
+    <a:masterClrMapping/>
+  </p:clrMapOvr>
+</p:sld>
+</file>
+
+<file path=ppt/slides/slide65.xml><?xml version="1.0" encoding="utf-8"?>
+<p:sld xmlns:a="http://schemas.openxmlformats.org/drawingml/2006/main" xmlns:p="http://schemas.openxmlformats.org/presentationml/2006/main" xmlns:r="http://schemas.openxmlformats.org/officeDocument/2006/relationships">
+  <p:cSld>
+    <p:spTree>
+      <p:nvGrpSpPr>
+        <p:cNvPr id="1" name=""/>
+        <p:cNvGrpSpPr/>
+        <p:nvPr/>
+      </p:nvGrpSpPr>
+      <p:grpSpPr/>
+      <p:sp>
+        <p:nvSpPr>
+          <p:cNvPr id="2" name="Rounded Rectangle 1"/>
+          <p:cNvSpPr/>
+          <p:nvPr/>
+        </p:nvSpPr>
+        <p:spPr>
+          <a:xfrm>
+            <a:off x="0" y="0"/>
+            <a:ext cx="12191695" cy="64008"/>
+          </a:xfrm>
+          <a:prstGeom prst="roundRect">
+            <a:avLst>
+              <a:gd name="adj" fmla="val 50000"/>
+            </a:avLst>
+          </a:prstGeom>
+          <a:solidFill>
+            <a:srgbClr val="0B5E54"/>
+          </a:solidFill>
+          <a:ln>
+            <a:noFill/>
+          </a:ln>
+          <a:effectLst/>
+        </p:spPr>
+        <p:style>
+          <a:lnRef idx="1">
+            <a:schemeClr val="accent1"/>
+          </a:lnRef>
+          <a:fillRef idx="3">
+            <a:schemeClr val="accent1"/>
+          </a:fillRef>
+          <a:effectRef idx="2">
+            <a:schemeClr val="accent1"/>
+          </a:effectRef>
+          <a:fontRef idx="minor">
+            <a:schemeClr val="lt1"/>
+          </a:fontRef>
+        </p:style>
+        <p:txBody>
+          <a:bodyPr rtlCol="0" anchor="ctr"/>
+          <a:lstStyle/>
+          <a:p>
+            <a:pPr algn="ctr"/>
+          </a:p>
+        </p:txBody>
+      </p:sp>
+      <p:sp>
+        <p:nvSpPr>
+          <p:cNvPr id="3" name="TextBox 2"/>
+          <p:cNvSpPr txBox="1"/>
+          <p:nvPr/>
+        </p:nvSpPr>
+        <p:spPr>
+          <a:xfrm>
+            <a:off x="475488" y="146304"/>
+            <a:ext cx="8229600" cy="292608"/>
+          </a:xfrm>
+          <a:prstGeom prst="rect">
+            <a:avLst/>
+          </a:prstGeom>
+          <a:noFill/>
+        </p:spPr>
+        <p:txBody>
+          <a:bodyPr wrap="square" anchor="t" lIns="0" rIns="0" tIns="0" bIns="0">
+            <a:spAutoFit/>
+          </a:bodyPr>
+          <a:lstStyle/>
+          <a:p>
+            <a:pPr algn="l">
+              <a:lnSpc>
+                <a:spcPct val="114000"/>
+              </a:lnSpc>
+            </a:pPr>
+            <a:r>
+              <a:rPr sz="1100" b="1">
+                <a:solidFill>
+                  <a:srgbClr val="0B5E54"/>
+                </a:solidFill>
+              </a:rPr>
+              <a:t>工单实战 · 运行留证</a:t>
+            </a:r>
+          </a:p>
+        </p:txBody>
+      </p:sp>
+      <p:sp>
+        <p:nvSpPr>
+          <p:cNvPr id="4" name="Rounded Rectangle 3"/>
+          <p:cNvSpPr/>
+          <p:nvPr/>
+        </p:nvSpPr>
+        <p:spPr>
+          <a:xfrm>
+            <a:off x="475488" y="475488"/>
+            <a:ext cx="2027872" cy="310896"/>
+          </a:xfrm>
+          <a:prstGeom prst="roundRect">
+            <a:avLst>
+              <a:gd name="adj" fmla="val 50000"/>
+            </a:avLst>
+          </a:prstGeom>
+          <a:solidFill>
+            <a:srgbClr val="C9A227"/>
+          </a:solidFill>
+          <a:ln>
+            <a:noFill/>
+          </a:ln>
+          <a:effectLst/>
+        </p:spPr>
+        <p:style>
+          <a:lnRef idx="1">
+            <a:schemeClr val="accent1"/>
+          </a:lnRef>
+          <a:fillRef idx="3">
+            <a:schemeClr val="accent1"/>
+          </a:fillRef>
+          <a:effectRef idx="2">
+            <a:schemeClr val="accent1"/>
+          </a:effectRef>
+          <a:fontRef idx="minor">
+            <a:schemeClr val="lt1"/>
+          </a:fontRef>
+        </p:style>
+        <p:txBody>
+          <a:bodyPr rtlCol="0" anchor="ctr"/>
+          <a:lstStyle/>
+          <a:p>
+            <a:pPr algn="ctr"/>
+          </a:p>
+        </p:txBody>
+      </p:sp>
+      <p:sp>
+        <p:nvSpPr>
+          <p:cNvPr id="5" name="TextBox 4"/>
+          <p:cNvSpPr txBox="1"/>
+          <p:nvPr/>
+        </p:nvSpPr>
+        <p:spPr>
+          <a:xfrm>
+            <a:off x="475488" y="475488"/>
+            <a:ext cx="2027872" cy="310896"/>
+          </a:xfrm>
+          <a:prstGeom prst="rect">
+            <a:avLst/>
+          </a:prstGeom>
+          <a:noFill/>
+        </p:spPr>
+        <p:txBody>
+          <a:bodyPr wrap="square" anchor="ctr" lIns="0" rIns="0" tIns="0" bIns="0">
+            <a:spAutoFit/>
+          </a:bodyPr>
+          <a:lstStyle/>
+          <a:p>
+            <a:pPr algn="ctr">
+              <a:lnSpc>
+                <a:spcPct val="114000"/>
+              </a:lnSpc>
+            </a:pPr>
+            <a:r>
+              <a:rPr sz="1050" b="1">
+                <a:solidFill>
+                  <a:srgbClr val="FFFFFF"/>
+                </a:solidFill>
+              </a:rPr>
+              <a:t>SCREENSHOT · 终端逐字截图</a:t>
+            </a:r>
+          </a:p>
+        </p:txBody>
+      </p:sp>
+      <p:sp>
+        <p:nvSpPr>
+          <p:cNvPr id="6" name="TextBox 5"/>
+          <p:cNvSpPr txBox="1"/>
+          <p:nvPr/>
+        </p:nvSpPr>
+        <p:spPr>
+          <a:xfrm>
+            <a:off x="475488" y="859536"/>
+            <a:ext cx="11237976" cy="502920"/>
+          </a:xfrm>
+          <a:prstGeom prst="rect">
+            <a:avLst/>
+          </a:prstGeom>
+          <a:noFill/>
+        </p:spPr>
+        <p:txBody>
+          <a:bodyPr wrap="square" anchor="t" lIns="0" rIns="0" tIns="0" bIns="0">
+            <a:spAutoFit/>
+          </a:bodyPr>
+          <a:lstStyle/>
+          <a:p>
+            <a:pPr algn="l">
+              <a:lnSpc>
+                <a:spcPct val="114000"/>
+              </a:lnSpc>
+            </a:pPr>
+            <a:r>
+              <a:rPr sz="2200" b="1">
+                <a:solidFill>
+                  <a:srgbClr val="1B2B28"/>
+                </a:solidFill>
+              </a:rPr>
+              <a:t>P2.2 · 另一套阶梯逐字输出＋pytest 全量实跑</a:t>
+            </a:r>
+          </a:p>
+        </p:txBody>
+      </p:sp>
+      <p:sp>
+        <p:nvSpPr>
+          <p:cNvPr id="7" name="Rounded Rectangle 6"/>
+          <p:cNvSpPr/>
+          <p:nvPr/>
+        </p:nvSpPr>
+        <p:spPr>
+          <a:xfrm>
+            <a:off x="475488" y="1389888"/>
+            <a:ext cx="1234440" cy="27432"/>
+          </a:xfrm>
+          <a:prstGeom prst="roundRect">
+            <a:avLst>
+              <a:gd name="adj" fmla="val 50000"/>
+            </a:avLst>
+          </a:prstGeom>
+          <a:solidFill>
+            <a:srgbClr val="C9A227"/>
+          </a:solidFill>
+          <a:ln>
+            <a:noFill/>
+          </a:ln>
+          <a:effectLst/>
+        </p:spPr>
+        <p:style>
+          <a:lnRef idx="1">
+            <a:schemeClr val="accent1"/>
+          </a:lnRef>
+          <a:fillRef idx="3">
+            <a:schemeClr val="accent1"/>
+          </a:fillRef>
+          <a:effectRef idx="2">
+            <a:schemeClr val="accent1"/>
+          </a:effectRef>
+          <a:fontRef idx="minor">
+            <a:schemeClr val="lt1"/>
+          </a:fontRef>
+        </p:style>
+        <p:txBody>
+          <a:bodyPr rtlCol="0" anchor="ctr"/>
+          <a:lstStyle/>
+          <a:p>
+            <a:pPr algn="ctr"/>
+          </a:p>
+        </p:txBody>
+      </p:sp>
+      <p:sp>
+        <p:nvSpPr>
+          <p:cNvPr id="8" name="Rounded Rectangle 7"/>
+          <p:cNvSpPr/>
+          <p:nvPr/>
+        </p:nvSpPr>
+        <p:spPr>
+          <a:xfrm>
+            <a:off x="475488" y="6419088"/>
+            <a:ext cx="11237976" cy="10972"/>
+          </a:xfrm>
+          <a:prstGeom prst="roundRect">
+            <a:avLst>
+              <a:gd name="adj" fmla="val 50000"/>
+            </a:avLst>
+          </a:prstGeom>
+          <a:solidFill>
+            <a:srgbClr val="E4F1EE"/>
+          </a:solidFill>
+          <a:ln>
+            <a:noFill/>
+          </a:ln>
+          <a:effectLst/>
+        </p:spPr>
+        <p:style>
+          <a:lnRef idx="1">
+            <a:schemeClr val="accent1"/>
+          </a:lnRef>
+          <a:fillRef idx="3">
+            <a:schemeClr val="accent1"/>
+          </a:fillRef>
+          <a:effectRef idx="2">
+            <a:schemeClr val="accent1"/>
+          </a:effectRef>
+          <a:fontRef idx="minor">
+            <a:schemeClr val="lt1"/>
+          </a:fontRef>
+        </p:style>
+        <p:txBody>
+          <a:bodyPr rtlCol="0" anchor="ctr"/>
+          <a:lstStyle/>
+          <a:p>
+            <a:pPr algn="ctr"/>
+          </a:p>
+        </p:txBody>
+      </p:sp>
+      <p:sp>
+        <p:nvSpPr>
+          <p:cNvPr id="9" name="TextBox 8"/>
+          <p:cNvSpPr txBox="1"/>
+          <p:nvPr/>
+        </p:nvSpPr>
+        <p:spPr>
+          <a:xfrm>
+            <a:off x="475488" y="6455664"/>
+            <a:ext cx="7315200" cy="292608"/>
+          </a:xfrm>
+          <a:prstGeom prst="rect">
+            <a:avLst/>
+          </a:prstGeom>
+          <a:noFill/>
+        </p:spPr>
+        <p:txBody>
+          <a:bodyPr wrap="square" anchor="t" lIns="0" rIns="0" tIns="0" bIns="0">
+            <a:spAutoFit/>
+          </a:bodyPr>
+          <a:lstStyle/>
+          <a:p>
+            <a:pPr algn="l">
+              <a:lnSpc>
+                <a:spcPct val="114000"/>
+              </a:lnSpc>
+            </a:pPr>
+            <a:r>
+              <a:rPr sz="900" b="0">
+                <a:solidFill>
+                  <a:srgbClr val="5C6E6A"/>
+                </a:solidFill>
+              </a:rPr>
+              <a:t>两江智造集团 · Python程序设计（项目实战）</a:t>
+            </a:r>
+          </a:p>
+        </p:txBody>
+      </p:sp>
+      <p:sp>
+        <p:nvSpPr>
+          <p:cNvPr id="10" name="TextBox 9"/>
+          <p:cNvSpPr txBox="1"/>
+          <p:nvPr/>
+        </p:nvSpPr>
+        <p:spPr>
+          <a:xfrm>
+            <a:off x="10597896" y="6537960"/>
+            <a:ext cx="996696" cy="301752"/>
+          </a:xfrm>
+          <a:prstGeom prst="rect">
+            <a:avLst/>
+          </a:prstGeom>
+          <a:noFill/>
+        </p:spPr>
+        <p:txBody>
+          <a:bodyPr wrap="square" anchor="t" lIns="0" rIns="0" tIns="0" bIns="0">
+            <a:spAutoFit/>
+          </a:bodyPr>
+          <a:lstStyle/>
+          <a:p>
+            <a:pPr algn="r">
+              <a:lnSpc>
+                <a:spcPct val="114000"/>
+              </a:lnSpc>
+            </a:pPr>
+            <a:r>
+              <a:rPr sz="1000" b="0">
+                <a:solidFill>
+                  <a:srgbClr val="8A97B5"/>
+                </a:solidFill>
+              </a:rPr>
+              <a:t>49 / 65</a:t>
+            </a:r>
+          </a:p>
+        </p:txBody>
+      </p:sp>
+      <p:sp>
+        <p:nvSpPr>
+          <p:cNvPr id="11" name="TextBox 10"/>
+          <p:cNvSpPr txBox="1"/>
+          <p:nvPr/>
+        </p:nvSpPr>
+        <p:spPr>
+          <a:xfrm>
+            <a:off x="475488" y="1517904"/>
+            <a:ext cx="11237976" cy="237744"/>
+          </a:xfrm>
+          <a:prstGeom prst="rect">
+            <a:avLst/>
+          </a:prstGeom>
+          <a:noFill/>
+        </p:spPr>
+        <p:txBody>
+          <a:bodyPr wrap="square" anchor="t" lIns="0" rIns="0" tIns="0" bIns="0">
+            <a:spAutoFit/>
+          </a:bodyPr>
+          <a:lstStyle/>
+          <a:p>
+            <a:pPr algn="l">
+              <a:lnSpc>
+                <a:spcPct val="114000"/>
+              </a:lnSpc>
+            </a:pPr>
+            <a:r>
+              <a:rPr sz="1000" b="0">
+                <a:solidFill>
+                  <a:srgbClr val="5C6E6A"/>
+                </a:solidFill>
+              </a:rPr>
+              <a:t>上：p22_feature_factory 分层达标逐字输出（见上一页）｜下：pytest 全量实跑（退出码 0，全绿）</a:t>
+            </a:r>
+          </a:p>
+        </p:txBody>
+      </p:sp>
+      <p:pic>
+        <p:nvPicPr>
+          <p:cNvPr id="12" name="Picture 11" descr="p22_feature_factory_classroom.png"/>
+          <p:cNvPicPr>
+            <a:picLocks noChangeAspect="1"/>
+          </p:cNvPicPr>
+          <p:nvPr/>
+        </p:nvPicPr>
+        <p:blipFill>
+          <a:blip r:embed="rId2"/>
+          <a:stretch>
+            <a:fillRect/>
+          </a:stretch>
+        </p:blipFill>
+        <p:spPr>
+          <a:xfrm>
+            <a:off x="2900678" y="1792224"/>
+            <a:ext cx="6387595" cy="2663627"/>
+          </a:xfrm>
+          <a:prstGeom prst="rect">
+            <a:avLst/>
+          </a:prstGeom>
+        </p:spPr>
+      </p:pic>
+      <p:sp>
+        <p:nvSpPr>
+          <p:cNvPr id="13" name="TextBox 12"/>
+          <p:cNvSpPr txBox="1"/>
+          <p:nvPr/>
+        </p:nvSpPr>
+        <p:spPr>
+          <a:xfrm>
+            <a:off x="475488" y="4492427"/>
+            <a:ext cx="11237976" cy="256032"/>
+          </a:xfrm>
+          <a:prstGeom prst="rect">
+            <a:avLst/>
+          </a:prstGeom>
+          <a:noFill/>
+        </p:spPr>
+        <p:txBody>
+          <a:bodyPr wrap="square" anchor="t" lIns="0" rIns="0" tIns="0" bIns="0">
+            <a:spAutoFit/>
+          </a:bodyPr>
+          <a:lstStyle/>
+          <a:p>
+            <a:pPr algn="l">
+              <a:lnSpc>
+                <a:spcPct val="114000"/>
+              </a:lnSpc>
+            </a:pPr>
+            <a:r>
+              <a:rPr sz="850" b="0">
+                <a:solidFill>
+                  <a:srgbClr val="5C6E6A"/>
+                </a:solidFill>
+              </a:rPr>
+              <a:t>▲ 分层达标（第 68 行起）：四档逐字原文，未改写</a:t>
+            </a:r>
+          </a:p>
+        </p:txBody>
+      </p:sp>
+      <p:pic>
+        <p:nvPicPr>
+          <p:cNvPr id="14" name="Picture 13" descr="p22_feature_factory_pytest.png"/>
+          <p:cNvPicPr>
+            <a:picLocks noChangeAspect="1"/>
+          </p:cNvPicPr>
+          <p:nvPr/>
+        </p:nvPicPr>
+        <p:blipFill>
+          <a:blip r:embed="rId3"/>
+          <a:stretch>
+            <a:fillRect/>
+          </a:stretch>
+        </p:blipFill>
+        <p:spPr>
+          <a:xfrm>
+            <a:off x="2900678" y="4766747"/>
+            <a:ext cx="6387595" cy="875101"/>
+          </a:xfrm>
+          <a:prstGeom prst="rect">
+            <a:avLst/>
+          </a:prstGeom>
+        </p:spPr>
+      </p:pic>
+      <p:sp>
+        <p:nvSpPr>
+          <p:cNvPr id="15" name="TextBox 14"/>
+          <p:cNvSpPr txBox="1"/>
+          <p:nvPr/>
+        </p:nvSpPr>
+        <p:spPr>
+          <a:xfrm>
+            <a:off x="475488" y="5678424"/>
+            <a:ext cx="11237976" cy="256032"/>
+          </a:xfrm>
+          <a:prstGeom prst="rect">
+            <a:avLst/>
+          </a:prstGeom>
+          <a:noFill/>
+        </p:spPr>
+        <p:txBody>
+          <a:bodyPr wrap="square" anchor="t" lIns="0" rIns="0" tIns="0" bIns="0">
+            <a:spAutoFit/>
+          </a:bodyPr>
+          <a:lstStyle/>
+          <a:p>
+            <a:pPr algn="l">
+              <a:lnSpc>
+                <a:spcPct val="114000"/>
+              </a:lnSpc>
+            </a:pPr>
+            <a:r>
+              <a:rPr sz="850" b="0">
+                <a:solidFill>
+                  <a:srgbClr val="5C6E6A"/>
+                </a:solidFill>
+              </a:rPr>
+              <a:t>▲ pytest：61 passed in 47.65s（本机实跑，非示例）</a:t>
+            </a:r>
+          </a:p>
+        </p:txBody>
+      </p:sp>
+    </p:spTree>
+  </p:cSld>
+  <p:clrMapOvr>
+    <a:masterClrMapping/>
+  </p:clrMapOvr>
+</p:sld>
+</file>
+
 <file path=ppt/slides/slide7.xml><?xml version="1.0" encoding="utf-8"?>
 <p:sld xmlns:a="http://schemas.openxmlformats.org/drawingml/2006/main" xmlns:p="http://schemas.openxmlformats.org/presentationml/2006/main" xmlns:r="http://schemas.openxmlformats.org/officeDocument/2006/relationships">
   <p:cSld>
@@ -58595,7 +61612,7 @@
                 </a:solidFill>
                 <a:latin typeface="微软雅黑"/>
               </a:rPr>
-              <a:t>7 / 62</a:t>
+              <a:t>7 / 65</a:t>
             </a:r>
           </a:p>
         </p:txBody>
@@ -59450,7 +62467,7 @@
                 </a:solidFill>
                 <a:latin typeface="微软雅黑"/>
               </a:rPr>
-              <a:t>8 / 62</a:t>
+              <a:t>8 / 65</a:t>
             </a:r>
           </a:p>
         </p:txBody>
@@ -61052,7 +64069,7 @@
                 </a:solidFill>
                 <a:latin typeface="微软雅黑"/>
               </a:rPr>
-              <a:t>9 / 62</a:t>
+              <a:t>9 / 65</a:t>
             </a:r>
           </a:p>
         </p:txBody>
